--- a/presentations/PR_L01_PrintingAndVariables_Lesson.pptx
+++ b/presentations/PR_L01_PrintingAndVariables_Lesson.pptx
@@ -2167,7 +2167,7 @@
                 <a:ea typeface="IBM Plex Sans" pitchFamily="34" charset="-122"/>
                 <a:cs typeface="IBM Plex Sans" pitchFamily="34" charset="-120"/>
               </a:rPr>
-              <a:t>Every program you will ever write starts here: showing something on the screen, storing a value and asking the user for one. Work through this room and you will have written your first real programs.</a:t>
+              <a:t>Every program you will ever write starts here: putting something on the screen, keeping a value under a name and asking the user for one. Work through the six stations and you will have written your first real programs.</a:t>
             </a:r>
             <a:endParaRPr lang="en-US" sz="1800" dirty="0"/>
           </a:p>
@@ -2569,7 +2569,7 @@
                 <a:ea typeface="IBM Plex Sans" pitchFamily="34" charset="-122"/>
                 <a:cs typeface="IBM Plex Sans" pitchFamily="34" charset="-120"/>
               </a:rPr>
-              <a:t>Real programs read several values, work something out and print a tidy report.</a:t>
+              <a:t>A whole program reads its values, works something out and then prints the lines it was asked for.</a:t>
             </a:r>
             <a:endParaRPr lang="en-US" sz="1700" dirty="0"/>
           </a:p>
@@ -2725,7 +2725,7 @@
                 <a:ea typeface="IBM Plex Sans" pitchFamily="34" charset="-122"/>
                 <a:cs typeface="IBM Plex Sans" pitchFamily="34" charset="-120"/>
               </a:rPr>
-              <a:t>Plan the inputs, the variables and the output lines of a competitor card.</a:t>
+              <a:t>Which parts of a program have to happen before anything can be printed?</a:t>
             </a:r>
             <a:endParaRPr lang="en-US" sz="1600" dirty="0"/>
           </a:p>
@@ -2805,7 +2805,7 @@
                 <a:ea typeface="IBM Plex Sans" pitchFamily="34" charset="-122"/>
                 <a:cs typeface="IBM Plex Sans" pitchFamily="34" charset="-120"/>
               </a:rPr>
-              <a:t>Input, process, output is such a common pattern that it has its own initials: IPO.</a:t>
+              <a:t>Input, process, output is such a common pattern that it is shortened to...</a:t>
             </a:r>
             <a:endParaRPr lang="en-US" sz="1600" dirty="0"/>
           </a:p>
@@ -3104,7 +3104,7 @@
                 <a:ea typeface="IBM Plex Sans" pitchFamily="34" charset="-122"/>
                 <a:cs typeface="IBM Plex Sans" pitchFamily="34" charset="-120"/>
               </a:rPr>
-              <a:t>Eight values have come through the till. Tap the star and sort each one into the data type Python would store it as.</a:t>
+              <a:t>Eight values are waiting on the floor below you. Tap the star and sort each one into the data type Python would store it as.</a:t>
             </a:r>
             <a:endParaRPr lang="en-US" sz="2200" dirty="0"/>
           </a:p>
@@ -3567,7 +3567,7 @@
                 <a:ea typeface="IBM Plex Sans" pitchFamily="34" charset="-122"/>
                 <a:cs typeface="IBM Plex Sans" pitchFamily="34" charset="-120"/>
               </a:rPr>
-              <a:t>A Python variable name can hold letters, digits and underscores, but it cannot start with a digit or contain a space.</a:t>
+              <a:t>A Python variable name can hold letters, digits and underscores, but it cannot start with a digit or contain a space. Capitals are used for the name of a constant, so a reader can see at a glance that the value is not meant to change.</a:t>
             </a:r>
             <a:endParaRPr lang="en-US" sz="1300" dirty="0"/>
           </a:p>
@@ -3675,7 +3675,7 @@
                 <a:ea typeface="IBM Plex Sans" pitchFamily="34" charset="-122"/>
                 <a:cs typeface="IBM Plex Sans" pitchFamily="34" charset="-120"/>
               </a:rPr>
-              <a:t>input() reads one whole line, so the program only carries on once the Enter key has been pressed.</a:t>
+              <a:t>input() reads one whole line, so the program only carries on once the Enter key has been pressed. Nothing else happens while it waits.</a:t>
             </a:r>
             <a:endParaRPr lang="en-US" sz="1300" dirty="0"/>
           </a:p>
@@ -4060,7 +4060,7 @@
                 <a:ea typeface="IBM Plex Sans" pitchFamily="34" charset="-122"/>
                 <a:cs typeface="IBM Plex Sans" pitchFamily="34" charset="-120"/>
               </a:rPr>
-              <a:t>A pupil writes two lines to add a 50p bag charge to a price that has been typed in: price = input('Price: ') and then print(price + 50). State what Python does when this runs, and rewrite the two lines so they work.</a:t>
+              <a:t>A pupil writes two lines to add 1 to a number that has been typed in: n = input() and then print(n + 1). State what Python does when these two lines run, and rewrite them so that they work.</a:t>
             </a:r>
             <a:endParaRPr lang="en-US" sz="1700" dirty="0"/>
           </a:p>
@@ -4190,7 +4190,7 @@
                 <a:ea typeface="IBM Plex Sans" pitchFamily="34" charset="-122"/>
                 <a:cs typeface="IBM Plex Sans" pitchFamily="34" charset="-120"/>
               </a:rPr>
-              <a:t>Write a program that reads a pupil's name and the number of library books they are holding, then prints one line giving the name and how many of their 6 allowed books are still free.</a:t>
+              <a:t>Write a program that reads a word and then a whole number, adds 1 to the number, and prints the word on one line and the new number on the next line.</a:t>
             </a:r>
             <a:endParaRPr lang="en-US" sz="1700" dirty="0"/>
           </a:p>
@@ -4320,7 +4320,7 @@
                 <a:ea typeface="IBM Plex Sans" pitchFamily="34" charset="-122"/>
                 <a:cs typeface="IBM Plex Sans" pitchFamily="34" charset="-120"/>
               </a:rPr>
-              <a:t>Write a program that reads the price of one pencil in pence and how many pencils are bought, then prints the total cost in pence.</a:t>
+              <a:t>Write a program that reads a number which may have a decimal point, and prints one line in the form Value is 4.0, with the number shown as a real number.</a:t>
             </a:r>
             <a:endParaRPr lang="en-US" sz="1700" dirty="0"/>
           </a:p>
@@ -4655,7 +4655,7 @@
                 <a:ea typeface="IBM Plex Sans" pitchFamily="34" charset="-122"/>
                 <a:cs typeface="IBM Plex Sans" pitchFamily="34" charset="-120"/>
               </a:rPr>
-              <a:t>Printing output and storing a value in a variable</a:t>
+              <a:t>Printing lines of output in the right order</a:t>
             </a:r>
             <a:endParaRPr lang="en-US" sz="1800" dirty="0"/>
           </a:p>
@@ -4919,7 +4919,7 @@
                 <a:ea typeface="IBM Plex Sans" pitchFamily="34" charset="-122"/>
                 <a:cs typeface="IBM Plex Sans" pitchFamily="34" charset="-120"/>
               </a:rPr>
-              <a:t>Reading input and choosing its data type</a:t>
+              <a:t>Holding values in variables and constants</a:t>
             </a:r>
             <a:endParaRPr lang="en-US" sz="1800" dirty="0"/>
           </a:p>
@@ -5726,7 +5726,7 @@
                 <a:ea typeface="IBM Plex Sans" pitchFamily="34" charset="-122"/>
                 <a:cs typeface="IBM Plex Sans" pitchFamily="34" charset="-120"/>
               </a:rPr>
-              <a:t>Know how to print a line of output and store a value in a variable</a:t>
+              <a:t>Know how to print lines of output in the order a task asks for</a:t>
             </a:r>
             <a:endParaRPr lang="en-US" sz="1900" dirty="0"/>
           </a:p>
@@ -5824,7 +5824,7 @@
                 <a:ea typeface="IBM Plex Sans" pitchFamily="34" charset="-122"/>
                 <a:cs typeface="IBM Plex Sans" pitchFamily="34" charset="-120"/>
               </a:rPr>
-              <a:t>Know how to read a value with input() and choose the data type it needs</a:t>
+              <a:t>Know how to hold a value in a variable or a constant, and how to read one with input()</a:t>
             </a:r>
             <a:endParaRPr lang="en-US" sz="1900" dirty="0"/>
           </a:p>
@@ -6108,7 +6108,7 @@
         <p:spPr>
           <a:xfrm>
             <a:off x="3621024" y="5468112"/>
-            <a:ext cx="1188720" cy="402336"/>
+            <a:ext cx="1627632" cy="402336"/>
           </a:xfrm>
           <a:prstGeom prst="roundRect">
             <a:avLst>
@@ -6135,7 +6135,7 @@
         <p:spPr>
           <a:xfrm>
             <a:off x="3621024" y="5468112"/>
-            <a:ext cx="1188720" cy="402336"/>
+            <a:ext cx="1627632" cy="402336"/>
           </a:xfrm>
           <a:prstGeom prst="rect">
             <a:avLst/>
@@ -6159,7 +6159,7 @@
                 <a:ea typeface="IBM Plex Sans" pitchFamily="34" charset="-122"/>
                 <a:cs typeface="IBM Plex Sans" pitchFamily="34" charset="-120"/>
               </a:rPr>
-              <a:t>input</a:t>
+              <a:t>Constant</a:t>
             </a:r>
             <a:endParaRPr lang="en-US" sz="1200" dirty="0"/>
           </a:p>
@@ -6173,8 +6173,8 @@
         </p:nvSpPr>
         <p:spPr>
           <a:xfrm>
-            <a:off x="4937760" y="5468112"/>
-            <a:ext cx="1335024" cy="402336"/>
+            <a:off x="5376672" y="5468112"/>
+            <a:ext cx="1188720" cy="402336"/>
           </a:xfrm>
           <a:prstGeom prst="roundRect">
             <a:avLst>
@@ -6200,8 +6200,8 @@
         </p:nvSpPr>
         <p:spPr>
           <a:xfrm>
-            <a:off x="4937760" y="5468112"/>
-            <a:ext cx="1335024" cy="402336"/>
+            <a:off x="5376672" y="5468112"/>
+            <a:ext cx="1188720" cy="402336"/>
           </a:xfrm>
           <a:prstGeom prst="rect">
             <a:avLst/>
@@ -6225,7 +6225,7 @@
                 <a:ea typeface="IBM Plex Sans" pitchFamily="34" charset="-122"/>
                 <a:cs typeface="IBM Plex Sans" pitchFamily="34" charset="-120"/>
               </a:rPr>
-              <a:t>String</a:t>
+              <a:t>input</a:t>
             </a:r>
             <a:endParaRPr lang="en-US" sz="1200" dirty="0"/>
           </a:p>
@@ -6239,8 +6239,8 @@
         </p:nvSpPr>
         <p:spPr>
           <a:xfrm>
-            <a:off x="6400800" y="5468112"/>
-            <a:ext cx="1481328" cy="402336"/>
+            <a:off x="6693408" y="5468112"/>
+            <a:ext cx="1335024" cy="402336"/>
           </a:xfrm>
           <a:prstGeom prst="roundRect">
             <a:avLst>
@@ -6266,8 +6266,8 @@
         </p:nvSpPr>
         <p:spPr>
           <a:xfrm>
-            <a:off x="6400800" y="5468112"/>
-            <a:ext cx="1481328" cy="402336"/>
+            <a:off x="6693408" y="5468112"/>
+            <a:ext cx="1335024" cy="402336"/>
           </a:xfrm>
           <a:prstGeom prst="rect">
             <a:avLst/>
@@ -6291,7 +6291,7 @@
                 <a:ea typeface="IBM Plex Sans" pitchFamily="34" charset="-122"/>
                 <a:cs typeface="IBM Plex Sans" pitchFamily="34" charset="-120"/>
               </a:rPr>
-              <a:t>Integer</a:t>
+              <a:t>String</a:t>
             </a:r>
             <a:endParaRPr lang="en-US" sz="1200" dirty="0"/>
           </a:p>
@@ -6305,7 +6305,7 @@
         </p:nvSpPr>
         <p:spPr>
           <a:xfrm>
-            <a:off x="8010144" y="5468112"/>
+            <a:off x="8156448" y="5468112"/>
             <a:ext cx="1481328" cy="402336"/>
           </a:xfrm>
           <a:prstGeom prst="roundRect">
@@ -6332,7 +6332,73 @@
         </p:nvSpPr>
         <p:spPr>
           <a:xfrm>
-            <a:off x="8010144" y="5468112"/>
+            <a:off x="8156448" y="5468112"/>
+            <a:ext cx="1481328" cy="402336"/>
+          </a:xfrm>
+          <a:prstGeom prst="rect">
+            <a:avLst/>
+          </a:prstGeom>
+          <a:noFill/>
+          <a:ln/>
+        </p:spPr>
+        <p:txBody>
+          <a:bodyPr wrap="square" lIns="0" tIns="0" rIns="0" bIns="0" rtlCol="0" anchor="ctr"/>
+          <a:lstStyle/>
+          <a:p>
+            <a:pPr algn="ctr" indent="0" marL="0">
+              <a:buNone/>
+            </a:pPr>
+            <a:r>
+              <a:rPr lang="en-US" sz="1200" dirty="0">
+                <a:solidFill>
+                  <a:srgbClr val="2D63FF"/>
+                </a:solidFill>
+                <a:latin typeface="IBM Plex Sans" pitchFamily="34" charset="0"/>
+                <a:ea typeface="IBM Plex Sans" pitchFamily="34" charset="-122"/>
+                <a:cs typeface="IBM Plex Sans" pitchFamily="34" charset="-120"/>
+              </a:rPr>
+              <a:t>Integer</a:t>
+            </a:r>
+            <a:endParaRPr lang="en-US" sz="1200" dirty="0"/>
+          </a:p>
+        </p:txBody>
+      </p:sp>
+      <p:sp>
+        <p:nvSpPr>
+          <p:cNvPr id="29" name="Shape 27"/>
+          <p:cNvSpPr/>
+          <p:nvPr/>
+        </p:nvSpPr>
+        <p:spPr>
+          <a:xfrm>
+            <a:off x="9765792" y="5468112"/>
+            <a:ext cx="1481328" cy="402336"/>
+          </a:xfrm>
+          <a:prstGeom prst="roundRect">
+            <a:avLst>
+              <a:gd name="adj" fmla="val 50000"/>
+            </a:avLst>
+          </a:prstGeom>
+          <a:solidFill>
+            <a:srgbClr val="FFFFFF"/>
+          </a:solidFill>
+          <a:ln w="12700">
+            <a:solidFill>
+              <a:srgbClr val="2D63FF"/>
+            </a:solidFill>
+            <a:prstDash val="solid"/>
+          </a:ln>
+        </p:spPr>
+      </p:sp>
+      <p:sp>
+        <p:nvSpPr>
+          <p:cNvPr id="30" name="Text 28"/>
+          <p:cNvSpPr txBox="1"/>
+          <p:nvPr/>
+        </p:nvSpPr>
+        <p:spPr>
+          <a:xfrm>
+            <a:off x="9765792" y="5468112"/>
             <a:ext cx="1481328" cy="402336"/>
           </a:xfrm>
           <a:prstGeom prst="rect">
@@ -6656,7 +6722,7 @@
                 <a:ea typeface="IBM Plex Sans" pitchFamily="34" charset="-122"/>
                 <a:cs typeface="IBM Plex Sans" pitchFamily="34" charset="-120"/>
               </a:rPr>
-              <a:t>Three lines run in this order: price = 40, then price = 65, then print(price). Write down exactly what is printed, and explain in one sentence what became of the first value.</a:t>
+              <a:t>Three lines run in this order: a = 40, then a = 65, then print(a). Write down exactly what is printed, and explain in one sentence what became of the first value.</a:t>
             </a:r>
             <a:endParaRPr lang="en-US" sz="2600" dirty="0"/>
           </a:p>
@@ -7791,7 +7857,7 @@
                 <a:ea typeface="IBM Plex Sans" pitchFamily="34" charset="-122"/>
                 <a:cs typeface="IBM Plex Sans" pitchFamily="34" charset="-120"/>
               </a:rPr>
-              <a:t>print() shows a value on the screen and then moves down to the next line.</a:t>
+              <a:t>print() puts one value on the screen and then moves down to the next line.</a:t>
             </a:r>
             <a:endParaRPr lang="en-US" sz="1700" dirty="0"/>
           </a:p>
@@ -7815,7 +7881,7 @@
                 <a:ea typeface="IBM Plex Sans" pitchFamily="34" charset="-122"/>
                 <a:cs typeface="IBM Plex Sans" pitchFamily="34" charset="-120"/>
               </a:rPr>
-              <a:t>Text to be printed exactly goes inside quotes, and one print() gives one line of output.</a:t>
+              <a:t>Text to be shown exactly as written goes inside quotation marks, and one print() gives one line of output.</a:t>
             </a:r>
             <a:endParaRPr lang="en-US" sz="1700" dirty="0"/>
           </a:p>
@@ -7839,7 +7905,7 @@
                 <a:ea typeface="IBM Plex Sans" pitchFamily="34" charset="-122"/>
                 <a:cs typeface="IBM Plex Sans" pitchFamily="34" charset="-120"/>
               </a:rPr>
-              <a:t>Common mistake: leaving the quotes off, so Python hunts for a variable with that name instead.</a:t>
+              <a:t>Common mistake: leaving the quotation marks off, so Python hunts for a variable with that name instead.</a:t>
             </a:r>
             <a:endParaRPr lang="en-US" sz="1700" dirty="0"/>
           </a:p>
@@ -7947,7 +8013,7 @@
                 <a:ea typeface="IBM Plex Sans" pitchFamily="34" charset="-122"/>
                 <a:cs typeface="IBM Plex Sans" pitchFamily="34" charset="-120"/>
               </a:rPr>
-              <a:t>Why does Python treat Juice and "Juice" as two completely different things?</a:t>
+              <a:t>Why does Python treat ready and "ready" as two completely different things?</a:t>
             </a:r>
             <a:endParaRPr lang="en-US" sz="1600" dirty="0"/>
           </a:p>
@@ -8027,7 +8093,7 @@
                 <a:ea typeface="IBM Plex Sans" pitchFamily="34" charset="-122"/>
                 <a:cs typeface="IBM Plex Sans" pitchFamily="34" charset="-120"/>
               </a:rPr>
-              <a:t>Printing one line of text is still the first program most programmers ever write.</a:t>
+              <a:t>Each print() shows one value and then moves on to...</a:t>
             </a:r>
             <a:endParaRPr lang="en-US" sz="1600" dirty="0"/>
           </a:p>
@@ -8367,7 +8433,7 @@
                 <a:ea typeface="IBM Plex Sans" pitchFamily="34" charset="-122"/>
                 <a:cs typeface="IBM Plex Sans" pitchFamily="34" charset="-120"/>
               </a:rPr>
-              <a:t>A variable is a named box in memory holding one value you can use again later.</a:t>
+              <a:t>A variable is a named box in memory holding one value, and the name always goes on the left of the equals sign.</a:t>
             </a:r>
             <a:endParaRPr lang="en-US" sz="1700" dirty="0"/>
           </a:p>
@@ -8391,7 +8457,7 @@
                 <a:ea typeface="IBM Plex Sans" pitchFamily="34" charset="-122"/>
                 <a:cs typeface="IBM Plex Sans" pitchFamily="34" charset="-120"/>
               </a:rPr>
-              <a:t>name = value stores it, and the name always goes on the left of the equals sign.</a:t>
+              <a:t>A constant is a value the program never changes once it is set, and its name is written in capitals.</a:t>
             </a:r>
             <a:endParaRPr lang="en-US" sz="1700" dirty="0"/>
           </a:p>
@@ -8523,7 +8589,7 @@
                 <a:ea typeface="IBM Plex Sans" pitchFamily="34" charset="-122"/>
                 <a:cs typeface="IBM Plex Sans" pitchFamily="34" charset="-120"/>
               </a:rPr>
-              <a:t>Name two values the till has to remember while it is running.</a:t>
+              <a:t>What becomes of the first value when the same variable is given a second one?</a:t>
             </a:r>
             <a:endParaRPr lang="en-US" sz="1600" dirty="0"/>
           </a:p>
@@ -8603,7 +8669,7 @@
                 <a:ea typeface="IBM Plex Sans" pitchFamily="34" charset="-122"/>
                 <a:cs typeface="IBM Plex Sans" pitchFamily="34" charset="-120"/>
               </a:rPr>
-              <a:t>In programming = means 'put this in here', not 'is the same as'.</a:t>
+              <a:t>In programming = means 'put this in here', so a second assignment does not add to the value, it...</a:t>
             </a:r>
             <a:endParaRPr lang="en-US" sz="1600" dirty="0"/>
           </a:p>
@@ -8991,7 +9057,7 @@
                 <a:ea typeface="IBM Plex Sans" pitchFamily="34" charset="-122"/>
                 <a:cs typeface="IBM Plex Sans" pitchFamily="34" charset="-120"/>
               </a:rPr>
-              <a:t>Common mistake: forgetting that input() always gives text, even when digits were typed.</a:t>
+              <a:t>Common mistake: reading two answers into the same variable, so the first one is lost.</a:t>
             </a:r>
             <a:endParaRPr lang="en-US" sz="1700" dirty="0"/>
           </a:p>
@@ -9099,7 +9165,7 @@
                 <a:ea typeface="IBM Plex Sans" pitchFamily="34" charset="-122"/>
                 <a:cs typeface="IBM Plex Sans" pitchFamily="34" charset="-120"/>
               </a:rPr>
-              <a:t>What is the difference between printing a prompt and reading the reply?</a:t>
+              <a:t>Why can a program print its answers in a different order from the one it asked the questions in?</a:t>
             </a:r>
             <a:endParaRPr lang="en-US" sz="1600" dirty="0"/>
           </a:p>
@@ -9179,7 +9245,7 @@
                 <a:ea typeface="IBM Plex Sans" pitchFamily="34" charset="-122"/>
                 <a:cs typeface="IBM Plex Sans" pitchFamily="34" charset="-120"/>
               </a:rPr>
-              <a:t>input() is patient: a program will sit on that line for as long as it takes.</a:t>
+              <a:t>input() is patient: a program will sit on that line until...</a:t>
             </a:r>
             <a:endParaRPr lang="en-US" sz="1600" dirty="0"/>
           </a:p>
@@ -9543,7 +9609,7 @@
                 <a:ea typeface="IBM Plex Sans" pitchFamily="34" charset="-122"/>
                 <a:cs typeface="IBM Plex Sans" pitchFamily="34" charset="-120"/>
               </a:rPr>
-              <a:t>+ adds two numbers but joins two strings, so the data type decides what happens.</a:t>
+              <a:t>+ adds two numbers but joins two strings end to end, so the data type decides what + means.</a:t>
             </a:r>
             <a:endParaRPr lang="en-US" sz="1700" dirty="0"/>
           </a:p>
@@ -9675,7 +9741,7 @@
                 <a:ea typeface="IBM Plex Sans" pitchFamily="34" charset="-122"/>
                 <a:cs typeface="IBM Plex Sans" pitchFamily="34" charset="-120"/>
               </a:rPr>
-              <a:t>Which data type would you choose for a library fine of 1.50, and why?</a:t>
+              <a:t>Which data type would you choose for a value of 1.50, and why?</a:t>
             </a:r>
             <a:endParaRPr lang="en-US" sz="1600" dirty="0"/>
           </a:p>
@@ -9755,7 +9821,7 @@
                 <a:ea typeface="IBM Plex Sans" pitchFamily="34" charset="-122"/>
                 <a:cs typeface="IBM Plex Sans" pitchFamily="34" charset="-120"/>
               </a:rPr>
-              <a:t>Joining strings end to end has its own name: concatenation.</a:t>
+              <a:t>Joining two strings end to end has its own name:...</a:t>
             </a:r>
             <a:endParaRPr lang="en-US" sz="1600" dirty="0"/>
           </a:p>
@@ -10143,7 +10209,7 @@
                 <a:ea typeface="IBM Plex Sans" pitchFamily="34" charset="-122"/>
                 <a:cs typeface="IBM Plex Sans" pitchFamily="34" charset="-120"/>
               </a:rPr>
-              <a:t>Common mistake: casting with int() before checking the text really is a whole number.</a:t>
+              <a:t>Common mistake: adding to what input() handed back without casting it first, which joins the digits on the end instead.</a:t>
             </a:r>
             <a:endParaRPr lang="en-US" sz="1700" dirty="0"/>
           </a:p>
@@ -10331,7 +10397,7 @@
                 <a:ea typeface="IBM Plex Sans" pitchFamily="34" charset="-122"/>
                 <a:cs typeface="IBM Plex Sans" pitchFamily="34" charset="-120"/>
               </a:rPr>
-              <a:t>Cast is borrowed from metalwork: the value is poured into a new shape.</a:t>
+              <a:t>Cast is borrowed from metalwork: the value is poured into...</a:t>
             </a:r>
             <a:endParaRPr lang="en-US" sz="1600" dirty="0"/>
           </a:p>

--- a/presentations/PR_L01_PrintingAndVariables_Lesson.pptx
+++ b/presentations/PR_L01_PrintingAndVariables_Lesson.pptx
@@ -3417,7 +3417,7 @@
                 <a:ea typeface="IBM Plex Sans" pitchFamily="34" charset="-122"/>
                 <a:cs typeface="IBM Plex Sans" pitchFamily="34" charset="-120"/>
               </a:rPr>
-              <a:t>The first line</a:t>
+              <a:t>Start here: how this course works</a:t>
             </a:r>
             <a:endParaRPr lang="en-US" sz="1600" dirty="0"/>
           </a:p>
@@ -3459,7 +3459,7 @@
                 <a:ea typeface="IBM Plex Sans" pitchFamily="34" charset="-122"/>
                 <a:cs typeface="IBM Plex Sans" pitchFamily="34" charset="-120"/>
               </a:rPr>
-              <a:t>Printing a greeting has been the traditional first program in a new language since the 1970s.</a:t>
+              <a:t>Python is a language for writing instructions a computer follows, one line at a time. You write them in the editor on the right of a task window. Run follows your instructions and shows whatever they display in the panel underneath, labelled Program output. Check my answer is different: it marks your program against the task. So run as often as you like while you are trying things out, and check when you think it is right. You can check as many times as you like too, and your best mark is the one that is kept. If you are stuck, the Hint button gives you one step at a time, starting with the idea and never with the answer, and Syntax reminder lists every Python command the course has taught so far. Errors are a normal part of programming. Everyone writing Python sees them all day, and reading the message is how you find out what to change. Work round this room through the six numbered badges in order, then tap the star for the final challenge. Your progress saves after every answer.</a:t>
             </a:r>
             <a:endParaRPr lang="en-US" sz="1300" dirty="0"/>
           </a:p>

--- a/presentations/PR_L01_PrintingAndVariables_Lesson.pptx
+++ b/presentations/PR_L01_PrintingAndVariables_Lesson.pptx
@@ -3459,7 +3459,7 @@
                 <a:ea typeface="IBM Plex Sans" pitchFamily="34" charset="-122"/>
                 <a:cs typeface="IBM Plex Sans" pitchFamily="34" charset="-120"/>
               </a:rPr>
-              <a:t>Python is a language for writing instructions a computer follows, one line at a time. You write them in the editor on the right of a task window. Run follows your instructions and shows whatever they display in the panel underneath, labelled Program output. Check my answer is different: it marks your program against the task. So run as often as you like while you are trying things out, and check when you think it is right. You can check as many times as you like too, and your best mark is the one that is kept. If you are stuck, the Hint button gives you one step at a time, starting with the idea and never with the answer, and Syntax reminder lists every Python command the course has taught so far. Errors are a normal part of programming. Everyone writing Python sees them all day, and reading the message is how you find out what to change. Work round this room through the six numbered badges in order, then tap the star for the final challenge. Your progress saves after every answer.</a:t>
+              <a:t>Python is a language for writing instructions a computer follows, one line at a time. You write them in the editor on the right of a task window. Run follows your instructions and shows whatever they display in the panel underneath, labelled Program output. Check my answer is different: it marks your program against the task. So run as often as you like while you are trying things out, and check when you think it is right. You can check as many times as you like, and your best mark is the one that is kept. You work through the course in order and complete every question: the next one opens when this one is finished, because each activity teaches what the next one needs. If you are stuck, the Hint button gives you one step at a time, starting with the idea and never with the answer, and Syntax reminder lists every Python command the course has taught so far. I need help is there from the first attempt on every question - it costs you nothing, and it will tell you to ask your teacher and show them the question and your code. Errors are a normal part of programming. Everyone writing Python sees them all day, and reading the message is how you find out what to change. Work round this room through the six numbered badges in order, then tap the star for the final challenge. A badge that says Later is not open yet: finish the one you are on first. Your progress saves after every answer, so you can stop and come back to the same question.</a:t>
             </a:r>
             <a:endParaRPr lang="en-US" sz="1300" dirty="0"/>
           </a:p>
@@ -4060,7 +4060,296 @@
                 <a:ea typeface="IBM Plex Sans" pitchFamily="34" charset="-122"/>
                 <a:cs typeface="IBM Plex Sans" pitchFamily="34" charset="-120"/>
               </a:rPr>
-              <a:t>A pupil writes two lines to add 1 to a number that has been typed in: n = input() and then print(n + 1). State what Python does when these two lines run, and rewrite them so that they work.</a:t>
+              <a:t>A pupil writes two lines to add 1 to a number that has been typed in: </a:t>
+            </a:r>
+            <a:pPr indent="0" marL="0">
+              <a:lnSpc>
+                <a:spcPct val="118000"/>
+              </a:lnSpc>
+              <a:buNone/>
+            </a:pPr>
+            <a:r>
+              <a:rPr lang="en-US" sz="1700" dirty="0">
+                <a:solidFill>
+                  <a:srgbClr val="18181B"/>
+                </a:solidFill>
+                <a:latin typeface="IBM Plex Mono" pitchFamily="34" charset="0"/>
+                <a:ea typeface="IBM Plex Mono" pitchFamily="34" charset="-122"/>
+                <a:cs typeface="IBM Plex Mono" pitchFamily="34" charset="-120"/>
+              </a:rPr>
+              <a:t>n</a:t>
+            </a:r>
+            <a:pPr indent="0" marL="0">
+              <a:lnSpc>
+                <a:spcPct val="118000"/>
+              </a:lnSpc>
+              <a:buNone/>
+            </a:pPr>
+            <a:r>
+              <a:rPr lang="en-US" sz="1700" dirty="0">
+                <a:solidFill>
+                  <a:srgbClr val="18181B"/>
+                </a:solidFill>
+                <a:latin typeface="IBM Plex Mono" pitchFamily="34" charset="0"/>
+                <a:ea typeface="IBM Plex Mono" pitchFamily="34" charset="-122"/>
+                <a:cs typeface="IBM Plex Mono" pitchFamily="34" charset="-120"/>
+              </a:rPr>
+              <a:t> </a:t>
+            </a:r>
+            <a:pPr indent="0" marL="0">
+              <a:lnSpc>
+                <a:spcPct val="118000"/>
+              </a:lnSpc>
+              <a:buNone/>
+            </a:pPr>
+            <a:r>
+              <a:rPr lang="en-US" sz="1700" dirty="0">
+                <a:solidFill>
+                  <a:srgbClr val="3F3F46"/>
+                </a:solidFill>
+                <a:latin typeface="IBM Plex Mono" pitchFamily="34" charset="0"/>
+                <a:ea typeface="IBM Plex Mono" pitchFamily="34" charset="-122"/>
+                <a:cs typeface="IBM Plex Mono" pitchFamily="34" charset="-120"/>
+              </a:rPr>
+              <a:t>=</a:t>
+            </a:r>
+            <a:pPr indent="0" marL="0">
+              <a:lnSpc>
+                <a:spcPct val="118000"/>
+              </a:lnSpc>
+              <a:buNone/>
+            </a:pPr>
+            <a:r>
+              <a:rPr lang="en-US" sz="1700" dirty="0">
+                <a:solidFill>
+                  <a:srgbClr val="18181B"/>
+                </a:solidFill>
+                <a:latin typeface="IBM Plex Mono" pitchFamily="34" charset="0"/>
+                <a:ea typeface="IBM Plex Mono" pitchFamily="34" charset="-122"/>
+                <a:cs typeface="IBM Plex Mono" pitchFamily="34" charset="-120"/>
+              </a:rPr>
+              <a:t> </a:t>
+            </a:r>
+            <a:pPr indent="0" marL="0">
+              <a:lnSpc>
+                <a:spcPct val="118000"/>
+              </a:lnSpc>
+              <a:buNone/>
+            </a:pPr>
+            <a:r>
+              <a:rPr lang="en-US" sz="1700" dirty="0">
+                <a:solidFill>
+                  <a:srgbClr val="1D4ED8"/>
+                </a:solidFill>
+                <a:latin typeface="IBM Plex Mono" pitchFamily="34" charset="0"/>
+                <a:ea typeface="IBM Plex Mono" pitchFamily="34" charset="-122"/>
+                <a:cs typeface="IBM Plex Mono" pitchFamily="34" charset="-120"/>
+              </a:rPr>
+              <a:t>input</a:t>
+            </a:r>
+            <a:pPr indent="0" marL="0">
+              <a:lnSpc>
+                <a:spcPct val="118000"/>
+              </a:lnSpc>
+              <a:buNone/>
+            </a:pPr>
+            <a:r>
+              <a:rPr lang="en-US" sz="1700" dirty="0">
+                <a:solidFill>
+                  <a:srgbClr val="3F3F46"/>
+                </a:solidFill>
+                <a:latin typeface="IBM Plex Mono" pitchFamily="34" charset="0"/>
+                <a:ea typeface="IBM Plex Mono" pitchFamily="34" charset="-122"/>
+                <a:cs typeface="IBM Plex Mono" pitchFamily="34" charset="-120"/>
+              </a:rPr>
+              <a:t>(</a:t>
+            </a:r>
+            <a:pPr indent="0" marL="0">
+              <a:lnSpc>
+                <a:spcPct val="118000"/>
+              </a:lnSpc>
+              <a:buNone/>
+            </a:pPr>
+            <a:r>
+              <a:rPr lang="en-US" sz="1700" dirty="0">
+                <a:solidFill>
+                  <a:srgbClr val="3F3F46"/>
+                </a:solidFill>
+                <a:latin typeface="IBM Plex Mono" pitchFamily="34" charset="0"/>
+                <a:ea typeface="IBM Plex Mono" pitchFamily="34" charset="-122"/>
+                <a:cs typeface="IBM Plex Mono" pitchFamily="34" charset="-120"/>
+              </a:rPr>
+              <a:t>)</a:t>
+            </a:r>
+            <a:pPr indent="0" marL="0">
+              <a:lnSpc>
+                <a:spcPct val="118000"/>
+              </a:lnSpc>
+              <a:buNone/>
+            </a:pPr>
+            <a:r>
+              <a:rPr lang="en-US" sz="1700" dirty="0">
+                <a:solidFill>
+                  <a:srgbClr val="101828"/>
+                </a:solidFill>
+                <a:latin typeface="IBM Plex Sans" pitchFamily="34" charset="0"/>
+                <a:ea typeface="IBM Plex Sans" pitchFamily="34" charset="-122"/>
+                <a:cs typeface="IBM Plex Sans" pitchFamily="34" charset="-120"/>
+              </a:rPr>
+              <a:t> and then </a:t>
+            </a:r>
+            <a:pPr indent="0" marL="0">
+              <a:lnSpc>
+                <a:spcPct val="118000"/>
+              </a:lnSpc>
+              <a:buNone/>
+            </a:pPr>
+            <a:r>
+              <a:rPr lang="en-US" sz="1700" dirty="0">
+                <a:solidFill>
+                  <a:srgbClr val="1D4ED8"/>
+                </a:solidFill>
+                <a:latin typeface="IBM Plex Mono" pitchFamily="34" charset="0"/>
+                <a:ea typeface="IBM Plex Mono" pitchFamily="34" charset="-122"/>
+                <a:cs typeface="IBM Plex Mono" pitchFamily="34" charset="-120"/>
+              </a:rPr>
+              <a:t>print</a:t>
+            </a:r>
+            <a:pPr indent="0" marL="0">
+              <a:lnSpc>
+                <a:spcPct val="118000"/>
+              </a:lnSpc>
+              <a:buNone/>
+            </a:pPr>
+            <a:r>
+              <a:rPr lang="en-US" sz="1700" dirty="0">
+                <a:solidFill>
+                  <a:srgbClr val="3F3F46"/>
+                </a:solidFill>
+                <a:latin typeface="IBM Plex Mono" pitchFamily="34" charset="0"/>
+                <a:ea typeface="IBM Plex Mono" pitchFamily="34" charset="-122"/>
+                <a:cs typeface="IBM Plex Mono" pitchFamily="34" charset="-120"/>
+              </a:rPr>
+              <a:t>(</a:t>
+            </a:r>
+            <a:pPr indent="0" marL="0">
+              <a:lnSpc>
+                <a:spcPct val="118000"/>
+              </a:lnSpc>
+              <a:buNone/>
+            </a:pPr>
+            <a:r>
+              <a:rPr lang="en-US" sz="1700" dirty="0">
+                <a:solidFill>
+                  <a:srgbClr val="18181B"/>
+                </a:solidFill>
+                <a:latin typeface="IBM Plex Mono" pitchFamily="34" charset="0"/>
+                <a:ea typeface="IBM Plex Mono" pitchFamily="34" charset="-122"/>
+                <a:cs typeface="IBM Plex Mono" pitchFamily="34" charset="-120"/>
+              </a:rPr>
+              <a:t>n</a:t>
+            </a:r>
+            <a:pPr indent="0" marL="0">
+              <a:lnSpc>
+                <a:spcPct val="118000"/>
+              </a:lnSpc>
+              <a:buNone/>
+            </a:pPr>
+            <a:r>
+              <a:rPr lang="en-US" sz="1700" dirty="0">
+                <a:solidFill>
+                  <a:srgbClr val="18181B"/>
+                </a:solidFill>
+                <a:latin typeface="IBM Plex Mono" pitchFamily="34" charset="0"/>
+                <a:ea typeface="IBM Plex Mono" pitchFamily="34" charset="-122"/>
+                <a:cs typeface="IBM Plex Mono" pitchFamily="34" charset="-120"/>
+              </a:rPr>
+              <a:t> </a:t>
+            </a:r>
+            <a:pPr indent="0" marL="0">
+              <a:lnSpc>
+                <a:spcPct val="118000"/>
+              </a:lnSpc>
+              <a:buNone/>
+            </a:pPr>
+            <a:r>
+              <a:rPr lang="en-US" sz="1700" dirty="0">
+                <a:solidFill>
+                  <a:srgbClr val="3F3F46"/>
+                </a:solidFill>
+                <a:latin typeface="IBM Plex Mono" pitchFamily="34" charset="0"/>
+                <a:ea typeface="IBM Plex Mono" pitchFamily="34" charset="-122"/>
+                <a:cs typeface="IBM Plex Mono" pitchFamily="34" charset="-120"/>
+              </a:rPr>
+              <a:t>+</a:t>
+            </a:r>
+            <a:pPr indent="0" marL="0">
+              <a:lnSpc>
+                <a:spcPct val="118000"/>
+              </a:lnSpc>
+              <a:buNone/>
+            </a:pPr>
+            <a:r>
+              <a:rPr lang="en-US" sz="1700" dirty="0">
+                <a:solidFill>
+                  <a:srgbClr val="18181B"/>
+                </a:solidFill>
+                <a:latin typeface="IBM Plex Mono" pitchFamily="34" charset="0"/>
+                <a:ea typeface="IBM Plex Mono" pitchFamily="34" charset="-122"/>
+                <a:cs typeface="IBM Plex Mono" pitchFamily="34" charset="-120"/>
+              </a:rPr>
+              <a:t> </a:t>
+            </a:r>
+            <a:pPr indent="0" marL="0">
+              <a:lnSpc>
+                <a:spcPct val="118000"/>
+              </a:lnSpc>
+              <a:buNone/>
+            </a:pPr>
+            <a:r>
+              <a:rPr lang="en-US" sz="1700" dirty="0">
+                <a:solidFill>
+                  <a:srgbClr val="9A3412"/>
+                </a:solidFill>
+                <a:latin typeface="IBM Plex Mono" pitchFamily="34" charset="0"/>
+                <a:ea typeface="IBM Plex Mono" pitchFamily="34" charset="-122"/>
+                <a:cs typeface="IBM Plex Mono" pitchFamily="34" charset="-120"/>
+              </a:rPr>
+              <a:t>1</a:t>
+            </a:r>
+            <a:pPr indent="0" marL="0">
+              <a:lnSpc>
+                <a:spcPct val="118000"/>
+              </a:lnSpc>
+              <a:buNone/>
+            </a:pPr>
+            <a:r>
+              <a:rPr lang="en-US" sz="1700" dirty="0">
+                <a:solidFill>
+                  <a:srgbClr val="3F3F46"/>
+                </a:solidFill>
+                <a:latin typeface="IBM Plex Mono" pitchFamily="34" charset="0"/>
+                <a:ea typeface="IBM Plex Mono" pitchFamily="34" charset="-122"/>
+                <a:cs typeface="IBM Plex Mono" pitchFamily="34" charset="-120"/>
+              </a:rPr>
+              <a:t>)</a:t>
+            </a:r>
+            <a:pPr indent="0" marL="0">
+              <a:lnSpc>
+                <a:spcPct val="118000"/>
+              </a:lnSpc>
+              <a:buNone/>
+            </a:pPr>
+            <a:r>
+              <a:rPr lang="en-US" sz="1700" dirty="0">
+                <a:solidFill>
+                  <a:srgbClr val="101828"/>
+                </a:solidFill>
+                <a:latin typeface="IBM Plex Sans" pitchFamily="34" charset="0"/>
+                <a:ea typeface="IBM Plex Sans" pitchFamily="34" charset="-122"/>
+                <a:cs typeface="IBM Plex Sans" pitchFamily="34" charset="-120"/>
+              </a:rPr>
+              <a:t>. State what Python does when these two lines run, and rewrite them so that they work.</a:t>
             </a:r>
             <a:endParaRPr lang="en-US" sz="1700" dirty="0"/>
           </a:p>

--- a/presentations/PR_L01_PrintingAndVariables_Lesson.pptx
+++ b/presentations/PR_L01_PrintingAndVariables_Lesson.pptx
@@ -19,9 +19,10 @@
     <p:sldId id="267" r:id="rId13"/>
     <p:sldId id="268" r:id="rId14"/>
     <p:sldId id="269" r:id="rId15"/>
+    <p:sldId id="270" r:id="rId16"/>
   </p:sldIdLst>
   <p:notesMasterIdLst>
-    <p:notesMasterId r:id="rId16"/>
+    <p:notesMasterId r:id="rId17"/>
   </p:notesMasterIdLst>
   <p:sldSz cx="12192000" cy="6858000"/>
   <p:notesSz cx="6858000" cy="12192000"/>
@@ -692,7 +693,14 @@
           <a:p>
             <a:r>
               <a:rPr lang="en-US" dirty="0"/>
-              <a:t>Make them commit to an answer on paper before they tap the star. Guessing first costs them the learning.</a:t>
+              <a:t>The answer is B: blue
+red.
+Do not say it yet. Every pupil commits first - fingers, whiteboards or a show of hands on each letter in turn - and you count the split before anyone can change their mind.
+IF MOST OF THE CLASS IS RIGHT: say why it is right in one sentence and go straight on to the independent work.
+IF A SIGNIFICANT GROUP IS ON ONE WRONG LETTER: that option is the misconception to teach against before anyone goes on. Go back to station 3, Reading input, and work through its example again, aloud, with the class watching, then re-ask this question.
+The course's own response to a wrong answer here: The reading order and the displaying order are separate. The first line typed goes into first, whatever happens next.
+A limitation, stated rather than papered over: one response covers every wrong option; it does not say what to revisit for each one. The course does not record what each separate wrong option means, and this slide does not invent it. Decide your own reteach for each option before the lesson; the options above are the start of it.
+This is a real activity from the experience (pr-l01-s3-c7), so the wording here is the wording a pupil will see.</a:t>
             </a:r>
             <a:endParaRPr lang="en-US" dirty="0"/>
           </a:p>
@@ -780,7 +788,7 @@
           <a:p>
             <a:r>
               <a:rPr lang="en-US" dirty="0"/>
-              <a:t>Use these as a settler, or as something for early finishers to read in the experience.</a:t>
+              <a:t>Make them commit to an answer on paper before they tap the star. Guessing first costs them the learning.</a:t>
             </a:r>
             <a:endParaRPr lang="en-US" dirty="0"/>
           </a:p>
@@ -868,7 +876,7 @@
           <a:p>
             <a:r>
               <a:rPr lang="en-US" dirty="0"/>
-              <a:t>Timed and silent. Mark against the answer sheet, then ask students to record their weakest area.</a:t>
+              <a:t>Use these as a settler, or as something for early finishers to read in the experience.</a:t>
             </a:r>
             <a:endParaRPr lang="en-US" dirty="0"/>
           </a:p>
@@ -956,7 +964,7 @@
           <a:p>
             <a:r>
               <a:rPr lang="en-US" dirty="0"/>
-              <a:t>Students copy their score-screen breakdown onto the worksheet, then rate themselves here.</a:t>
+              <a:t>Timed and silent. Mark against the answer sheet, then ask students to record their weakest area.</a:t>
             </a:r>
             <a:endParaRPr lang="en-US" dirty="0"/>
           </a:p>
@@ -980,6 +988,94 @@
             <a:fld id="{F7021451-1387-4CA6-816F-3879F97B5CBC}" type="slidenum">
               <a:rPr lang="en-US"/>
               <a:t>14</a:t>
+            </a:fld>
+            <a:endParaRPr lang="en-US"/>
+          </a:p>
+        </p:txBody>
+      </p:sp>
+    </p:spTree>
+    <p:extLst>
+      <p:ext uri="{BB962C8B-B14F-4D97-AF65-F5344CB8AC3E}">
+        <p14:creationId xmlns:p14="http://schemas.microsoft.com/office/powerpoint/2010/main" val="1024086991"/>
+      </p:ext>
+    </p:extLst>
+  </p:cSld>
+  <p:clrMapOvr>
+    <a:masterClrMapping/>
+  </p:clrMapOvr>
+</p:notes>
+</file>
+
+<file path=ppt/notesSlides/notesSlide15.xml><?xml version="1.0" encoding="utf-8"?>
+<p:notes xmlns:a="http://schemas.openxmlformats.org/drawingml/2006/main" xmlns:r="http://schemas.openxmlformats.org/officeDocument/2006/relationships" xmlns:p="http://schemas.openxmlformats.org/presentationml/2006/main">
+  <p:cSld>
+    <p:spTree>
+      <p:nvGrpSpPr>
+        <p:cNvPr id="1" name=""/>
+        <p:cNvGrpSpPr/>
+        <p:nvPr/>
+      </p:nvGrpSpPr>
+      <p:grpSpPr>
+        <a:xfrm>
+          <a:off x="0" y="0"/>
+          <a:ext cx="0" cy="0"/>
+          <a:chOff x="0" y="0"/>
+          <a:chExt cx="0" cy="0"/>
+        </a:xfrm>
+      </p:grpSpPr>
+      <p:sp>
+        <p:nvSpPr>
+          <p:cNvPr id="2" name="Slide Image Placeholder 1"/>
+          <p:cNvSpPr>
+            <a:spLocks noGrp="1" noRot="1" noChangeAspect="1"/>
+          </p:cNvSpPr>
+          <p:nvPr>
+            <p:ph type="sldImg"/>
+          </p:nvPr>
+        </p:nvSpPr>
+        <p:spPr/>
+      </p:sp>
+      <p:sp>
+        <p:nvSpPr>
+          <p:cNvPr id="3" name="Notes Placeholder 2"/>
+          <p:cNvSpPr>
+            <a:spLocks noGrp="1"/>
+          </p:cNvSpPr>
+          <p:nvPr>
+            <p:ph type="body" idx="1"/>
+          </p:nvPr>
+        </p:nvSpPr>
+        <p:spPr/>
+        <p:txBody>
+          <a:bodyPr/>
+          <a:lstStyle/>
+          <a:p>
+            <a:r>
+              <a:rPr lang="en-US" dirty="0"/>
+              <a:t>Students copy their score-screen breakdown onto the worksheet, then rate themselves here.</a:t>
+            </a:r>
+            <a:endParaRPr lang="en-US" dirty="0"/>
+          </a:p>
+        </p:txBody>
+      </p:sp>
+      <p:sp>
+        <p:nvSpPr>
+          <p:cNvPr id="4" name="Slide Number Placeholder 3"/>
+          <p:cNvSpPr>
+            <a:spLocks noGrp="1"/>
+          </p:cNvSpPr>
+          <p:nvPr>
+            <p:ph type="sldNum" sz="quarter" idx="10"/>
+          </p:nvPr>
+        </p:nvSpPr>
+        <p:spPr/>
+        <p:txBody>
+          <a:bodyPr/>
+          <a:lstStyle/>
+          <a:p>
+            <a:fld id="{F7021451-1387-4CA6-816F-3879F97B5CBC}" type="slidenum">
+              <a:rPr lang="en-US"/>
+              <a:t>15</a:t>
             </a:fld>
             <a:endParaRPr lang="en-US"/>
           </a:p>
@@ -2949,12 +3045,12 @@
         </p:nvSpPr>
         <p:spPr>
           <a:xfrm>
-            <a:off x="502920" y="438912"/>
-            <a:ext cx="3108960" cy="502920"/>
+            <a:off x="502920" y="457200"/>
+            <a:ext cx="1051560" cy="420624"/>
           </a:xfrm>
           <a:prstGeom prst="roundRect">
             <a:avLst>
-              <a:gd name="adj" fmla="val 18182"/>
+              <a:gd name="adj" fmla="val 21739"/>
             </a:avLst>
           </a:prstGeom>
           <a:solidFill>
@@ -2971,8 +3067,8 @@
         </p:nvSpPr>
         <p:spPr>
           <a:xfrm>
-            <a:off x="502920" y="438912"/>
-            <a:ext cx="3108960" cy="502920"/>
+            <a:off x="502920" y="457200"/>
+            <a:ext cx="1051560" cy="420624"/>
           </a:xfrm>
           <a:prstGeom prst="rect">
             <a:avLst/>
@@ -2988,7 +3084,7 @@
               <a:buNone/>
             </a:pPr>
             <a:r>
-              <a:rPr lang="en-US" sz="1300" b="1" dirty="0">
+              <a:rPr lang="en-US" sz="1200" b="1" dirty="0">
                 <a:solidFill>
                   <a:srgbClr val="101828"/>
                 </a:solidFill>
@@ -2996,9 +3092,9 @@
                 <a:ea typeface="IBM Plex Mono" pitchFamily="34" charset="-122"/>
                 <a:cs typeface="IBM Plex Mono" pitchFamily="34" charset="-120"/>
               </a:rPr>
-              <a:t>★  FINAL CHALLENGE</a:t>
-            </a:r>
-            <a:endParaRPr lang="en-US" sz="1300" dirty="0"/>
+              <a:t>CHECK</a:t>
+            </a:r>
+            <a:endParaRPr lang="en-US" sz="1200" dirty="0"/>
           </a:p>
         </p:txBody>
       </p:sp>
@@ -3010,8 +3106,8 @@
         </p:nvSpPr>
         <p:spPr>
           <a:xfrm>
-            <a:off x="502920" y="1097280"/>
-            <a:ext cx="11155680" cy="731520"/>
+            <a:off x="1737360" y="457200"/>
+            <a:ext cx="9875520" cy="420624"/>
           </a:xfrm>
           <a:prstGeom prst="rect">
             <a:avLst/>
@@ -3027,34 +3123,76 @@
               <a:buNone/>
             </a:pPr>
             <a:r>
-              <a:rPr lang="en-US" sz="3400" b="1" dirty="0">
-                <a:solidFill>
-                  <a:srgbClr val="101828"/>
+              <a:rPr lang="en-US" sz="1500" dirty="0">
+                <a:solidFill>
+                  <a:srgbClr val="667085"/>
                 </a:solidFill>
                 <a:latin typeface="IBM Plex Sans" pitchFamily="34" charset="0"/>
                 <a:ea typeface="IBM Plex Sans" pitchFamily="34" charset="-122"/>
                 <a:cs typeface="IBM Plex Sans" pitchFamily="34" charset="-120"/>
               </a:rPr>
-              <a:t>Name the data type</a:t>
-            </a:r>
-            <a:endParaRPr lang="en-US" sz="3400" dirty="0"/>
-          </a:p>
-        </p:txBody>
-      </p:sp>
-      <p:sp>
-        <p:nvSpPr>
-          <p:cNvPr id="8" name="Shape 6"/>
+              <a:t>Hands down. Everyone commits.</a:t>
+            </a:r>
+            <a:endParaRPr lang="en-US" sz="1500" dirty="0"/>
+          </a:p>
+        </p:txBody>
+      </p:sp>
+      <p:sp>
+        <p:nvSpPr>
+          <p:cNvPr id="8" name="Text 6"/>
+          <p:cNvSpPr txBox="1"/>
+          <p:nvPr/>
+        </p:nvSpPr>
+        <p:spPr>
+          <a:xfrm>
+            <a:off x="502920" y="1097280"/>
+            <a:ext cx="11155680" cy="914400"/>
+          </a:xfrm>
+          <a:prstGeom prst="rect">
+            <a:avLst/>
+          </a:prstGeom>
+          <a:noFill/>
+          <a:ln/>
+        </p:spPr>
+        <p:txBody>
+          <a:bodyPr wrap="square" lIns="0" tIns="0" rIns="0" bIns="0" rtlCol="0" anchor="ctr"/>
+          <a:lstStyle/>
+          <a:p>
+            <a:pPr indent="0" marL="0">
+              <a:lnSpc>
+                <a:spcPct val="115000"/>
+              </a:lnSpc>
+              <a:buNone/>
+            </a:pPr>
+            <a:r>
+              <a:rPr lang="en-US" sz="2600" b="1" dirty="0">
+                <a:solidFill>
+                  <a:srgbClr val="101828"/>
+                </a:solidFill>
+                <a:latin typeface="IBM Plex Sans" pitchFamily="34" charset="0"/>
+                <a:ea typeface="IBM Plex Sans" pitchFamily="34" charset="-122"/>
+                <a:cs typeface="IBM Plex Sans" pitchFamily="34" charset="-120"/>
+              </a:rPr>
+              <a:t>The user types red and then blue. What will this program display?</a:t>
+            </a:r>
+            <a:endParaRPr lang="en-US" sz="2600" dirty="0"/>
+          </a:p>
+        </p:txBody>
+      </p:sp>
+      <p:sp>
+        <p:nvSpPr>
+          <p:cNvPr id="9" name="Shape 7"/>
           <p:cNvSpPr/>
           <p:nvPr/>
         </p:nvSpPr>
         <p:spPr>
           <a:xfrm>
-            <a:off x="502920" y="2011680"/>
-            <a:ext cx="11155680" cy="2194560"/>
+            <a:off x="502920" y="2148840"/>
+            <a:ext cx="5029200" cy="1554480"/>
           </a:xfrm>
           <a:prstGeom prst="roundRect">
             <a:avLst>
-              <a:gd name="adj" fmla="val 5000"/>
+              <a:gd name="adj" fmla="val 7059"/>
             </a:avLst>
           </a:prstGeom>
           <a:solidFill>
@@ -3062,7 +3200,7 @@
           </a:solidFill>
           <a:ln w="15875">
             <a:solidFill>
-              <a:srgbClr val="2D63FF"/>
+              <a:srgbClr val="D9DEE7"/>
             </a:solidFill>
             <a:prstDash val="solid"/>
           </a:ln>
@@ -3070,33 +3208,223 @@
       </p:sp>
       <p:sp>
         <p:nvSpPr>
-          <p:cNvPr id="9" name="Text 7"/>
-          <p:cNvSpPr txBox="1"/>
-          <p:nvPr/>
-        </p:nvSpPr>
-        <p:spPr>
-          <a:xfrm>
-            <a:off x="1005840" y="2331720"/>
-            <a:ext cx="10149840" cy="1554480"/>
-          </a:xfrm>
-          <a:prstGeom prst="rect">
-            <a:avLst/>
-          </a:prstGeom>
-          <a:noFill/>
-          <a:ln/>
-        </p:spPr>
-        <p:txBody>
-          <a:bodyPr wrap="square" lIns="0" tIns="0" rIns="0" bIns="0" rtlCol="0" anchor="ctr"/>
+          <p:cNvPr id="10" name="Text 8"/>
+          <p:cNvSpPr txBox="1"/>
+          <p:nvPr/>
+        </p:nvSpPr>
+        <p:spPr>
+          <a:xfrm>
+            <a:off x="822960" y="2350008"/>
+            <a:ext cx="4480560" cy="1152144"/>
+          </a:xfrm>
+          <a:prstGeom prst="rect">
+            <a:avLst/>
+          </a:prstGeom>
+          <a:noFill/>
+          <a:ln/>
+        </p:spPr>
+        <p:txBody>
+          <a:bodyPr wrap="square" lIns="0" tIns="0" rIns="0" bIns="0" rtlCol="0" anchor="t"/>
           <a:lstStyle/>
           <a:p>
             <a:pPr indent="0" marL="0">
               <a:lnSpc>
-                <a:spcPct val="130000"/>
+                <a:spcPct val="125000"/>
               </a:lnSpc>
               <a:buNone/>
             </a:pPr>
             <a:r>
-              <a:rPr lang="en-US" sz="2200" dirty="0">
+              <a:rPr lang="en-US" sz="1500" dirty="0">
+                <a:solidFill>
+                  <a:srgbClr val="101828"/>
+                </a:solidFill>
+                <a:latin typeface="IBM Plex Mono" pitchFamily="34" charset="0"/>
+                <a:ea typeface="IBM Plex Mono" pitchFamily="34" charset="-122"/>
+                <a:cs typeface="IBM Plex Mono" pitchFamily="34" charset="-120"/>
+              </a:rPr>
+              <a:t>first = input()</a:t>
+            </a:r>
+            <a:endParaRPr lang="en-US" sz="1500" dirty="0"/>
+          </a:p>
+          <a:p>
+            <a:pPr indent="0" marL="0">
+              <a:lnSpc>
+                <a:spcPct val="125000"/>
+              </a:lnSpc>
+              <a:buNone/>
+            </a:pPr>
+            <a:r>
+              <a:rPr lang="en-US" sz="1500" dirty="0">
+                <a:solidFill>
+                  <a:srgbClr val="101828"/>
+                </a:solidFill>
+                <a:latin typeface="IBM Plex Mono" pitchFamily="34" charset="0"/>
+                <a:ea typeface="IBM Plex Mono" pitchFamily="34" charset="-122"/>
+                <a:cs typeface="IBM Plex Mono" pitchFamily="34" charset="-120"/>
+              </a:rPr>
+              <a:t>second = input()</a:t>
+            </a:r>
+            <a:endParaRPr lang="en-US" sz="1500" dirty="0"/>
+          </a:p>
+          <a:p>
+            <a:pPr indent="0" marL="0">
+              <a:lnSpc>
+                <a:spcPct val="125000"/>
+              </a:lnSpc>
+              <a:buNone/>
+            </a:pPr>
+            <a:r>
+              <a:rPr lang="en-US" sz="1500" dirty="0">
+                <a:solidFill>
+                  <a:srgbClr val="101828"/>
+                </a:solidFill>
+                <a:latin typeface="IBM Plex Mono" pitchFamily="34" charset="0"/>
+                <a:ea typeface="IBM Plex Mono" pitchFamily="34" charset="-122"/>
+                <a:cs typeface="IBM Plex Mono" pitchFamily="34" charset="-120"/>
+              </a:rPr>
+              <a:t>print(second)</a:t>
+            </a:r>
+            <a:endParaRPr lang="en-US" sz="1500" dirty="0"/>
+          </a:p>
+          <a:p>
+            <a:pPr indent="0" marL="0">
+              <a:lnSpc>
+                <a:spcPct val="125000"/>
+              </a:lnSpc>
+              <a:buNone/>
+            </a:pPr>
+            <a:r>
+              <a:rPr lang="en-US" sz="1500" dirty="0">
+                <a:solidFill>
+                  <a:srgbClr val="101828"/>
+                </a:solidFill>
+                <a:latin typeface="IBM Plex Mono" pitchFamily="34" charset="0"/>
+                <a:ea typeface="IBM Plex Mono" pitchFamily="34" charset="-122"/>
+                <a:cs typeface="IBM Plex Mono" pitchFamily="34" charset="-120"/>
+              </a:rPr>
+              <a:t>print(first)</a:t>
+            </a:r>
+            <a:endParaRPr lang="en-US" sz="1500" dirty="0"/>
+          </a:p>
+        </p:txBody>
+      </p:sp>
+      <p:sp>
+        <p:nvSpPr>
+          <p:cNvPr id="11" name="Shape 9"/>
+          <p:cNvSpPr/>
+          <p:nvPr/>
+        </p:nvSpPr>
+        <p:spPr>
+          <a:xfrm>
+            <a:off x="5806440" y="2148840"/>
+            <a:ext cx="5852160" cy="731520"/>
+          </a:xfrm>
+          <a:prstGeom prst="roundRect">
+            <a:avLst>
+              <a:gd name="adj" fmla="val 15000"/>
+            </a:avLst>
+          </a:prstGeom>
+          <a:solidFill>
+            <a:srgbClr val="FFFFFF"/>
+          </a:solidFill>
+          <a:ln w="15875">
+            <a:solidFill>
+              <a:srgbClr val="D9DEE7"/>
+            </a:solidFill>
+            <a:prstDash val="solid"/>
+          </a:ln>
+        </p:spPr>
+      </p:sp>
+      <p:sp>
+        <p:nvSpPr>
+          <p:cNvPr id="12" name="Shape 10"/>
+          <p:cNvSpPr/>
+          <p:nvPr/>
+        </p:nvSpPr>
+        <p:spPr>
+          <a:xfrm>
+            <a:off x="6080760" y="2295144"/>
+            <a:ext cx="438912" cy="438912"/>
+          </a:xfrm>
+          <a:prstGeom prst="roundRect">
+            <a:avLst>
+              <a:gd name="adj" fmla="val 20833"/>
+            </a:avLst>
+          </a:prstGeom>
+          <a:solidFill>
+            <a:srgbClr val="EEF2FB"/>
+          </a:solidFill>
+          <a:ln/>
+        </p:spPr>
+      </p:sp>
+      <p:sp>
+        <p:nvSpPr>
+          <p:cNvPr id="13" name="Text 11"/>
+          <p:cNvSpPr txBox="1"/>
+          <p:nvPr/>
+        </p:nvSpPr>
+        <p:spPr>
+          <a:xfrm>
+            <a:off x="6080760" y="2295144"/>
+            <a:ext cx="438912" cy="438912"/>
+          </a:xfrm>
+          <a:prstGeom prst="rect">
+            <a:avLst/>
+          </a:prstGeom>
+          <a:noFill/>
+          <a:ln/>
+        </p:spPr>
+        <p:txBody>
+          <a:bodyPr wrap="square" lIns="0" tIns="0" rIns="0" bIns="0" rtlCol="0" anchor="ctr"/>
+          <a:lstStyle/>
+          <a:p>
+            <a:pPr algn="ctr" indent="0" marL="0">
+              <a:buNone/>
+            </a:pPr>
+            <a:r>
+              <a:rPr lang="en-US" sz="1300" b="1" dirty="0">
+                <a:solidFill>
+                  <a:srgbClr val="2D63FF"/>
+                </a:solidFill>
+                <a:latin typeface="IBM Plex Mono" pitchFamily="34" charset="0"/>
+                <a:ea typeface="IBM Plex Mono" pitchFamily="34" charset="-122"/>
+                <a:cs typeface="IBM Plex Mono" pitchFamily="34" charset="-120"/>
+              </a:rPr>
+              <a:t>A</a:t>
+            </a:r>
+            <a:endParaRPr lang="en-US" sz="1300" dirty="0"/>
+          </a:p>
+        </p:txBody>
+      </p:sp>
+      <p:sp>
+        <p:nvSpPr>
+          <p:cNvPr id="14" name="Text 12"/>
+          <p:cNvSpPr txBox="1"/>
+          <p:nvPr/>
+        </p:nvSpPr>
+        <p:spPr>
+          <a:xfrm>
+            <a:off x="6720840" y="2148840"/>
+            <a:ext cx="4754880" cy="731520"/>
+          </a:xfrm>
+          <a:prstGeom prst="rect">
+            <a:avLst/>
+          </a:prstGeom>
+          <a:noFill/>
+          <a:ln/>
+        </p:spPr>
+        <p:txBody>
+          <a:bodyPr wrap="square" lIns="0" tIns="0" rIns="0" bIns="0" rtlCol="0" anchor="ctr"/>
+          <a:lstStyle/>
+          <a:p>
+            <a:pPr indent="0" marL="0">
+              <a:lnSpc>
+                <a:spcPct val="115000"/>
+              </a:lnSpc>
+              <a:buNone/>
+            </a:pPr>
+            <a:r>
+              <a:rPr lang="en-US" sz="1700" dirty="0">
                 <a:solidFill>
                   <a:srgbClr val="101828"/>
                 </a:solidFill>
@@ -3104,48 +3432,329 @@
                 <a:ea typeface="IBM Plex Sans" pitchFamily="34" charset="-122"/>
                 <a:cs typeface="IBM Plex Sans" pitchFamily="34" charset="-120"/>
               </a:rPr>
-              <a:t>Eight values are waiting on the floor below you. Tap the star and sort each one into the data type Python would store it as.</a:t>
-            </a:r>
-            <a:endParaRPr lang="en-US" sz="2200" dirty="0"/>
-          </a:p>
-        </p:txBody>
-      </p:sp>
-      <p:sp>
-        <p:nvSpPr>
-          <p:cNvPr id="10" name="Text 8"/>
-          <p:cNvSpPr txBox="1"/>
-          <p:nvPr/>
-        </p:nvSpPr>
-        <p:spPr>
-          <a:xfrm>
-            <a:off x="502920" y="4526280"/>
-            <a:ext cx="11155680" cy="457200"/>
-          </a:xfrm>
-          <a:prstGeom prst="rect">
-            <a:avLst/>
-          </a:prstGeom>
-          <a:noFill/>
-          <a:ln/>
-        </p:spPr>
-        <p:txBody>
-          <a:bodyPr wrap="square" lIns="0" tIns="0" rIns="0" bIns="0" rtlCol="0" anchor="ctr"/>
-          <a:lstStyle/>
+              <a:t>red</a:t>
+            </a:r>
+            <a:endParaRPr lang="en-US" sz="1700" dirty="0"/>
+          </a:p>
           <a:p>
             <a:pPr indent="0" marL="0">
-              <a:buNone/>
-            </a:pPr>
-            <a:r>
-              <a:rPr lang="en-US" sz="1600" dirty="0">
-                <a:solidFill>
-                  <a:srgbClr val="667085"/>
+              <a:lnSpc>
+                <a:spcPct val="115000"/>
+              </a:lnSpc>
+              <a:buNone/>
+            </a:pPr>
+            <a:r>
+              <a:rPr lang="en-US" sz="1700" dirty="0">
+                <a:solidFill>
+                  <a:srgbClr val="101828"/>
                 </a:solidFill>
                 <a:latin typeface="IBM Plex Sans" pitchFamily="34" charset="0"/>
                 <a:ea typeface="IBM Plex Sans" pitchFamily="34" charset="-122"/>
                 <a:cs typeface="IBM Plex Sans" pitchFamily="34" charset="-120"/>
               </a:rPr>
-              <a:t>Predict on paper first, then look down and test it.</a:t>
-            </a:r>
-            <a:endParaRPr lang="en-US" sz="1600" dirty="0"/>
+              <a:t>red</a:t>
+            </a:r>
+            <a:endParaRPr lang="en-US" sz="1700" dirty="0"/>
+          </a:p>
+        </p:txBody>
+      </p:sp>
+      <p:sp>
+        <p:nvSpPr>
+          <p:cNvPr id="15" name="Shape 13"/>
+          <p:cNvSpPr/>
+          <p:nvPr/>
+        </p:nvSpPr>
+        <p:spPr>
+          <a:xfrm>
+            <a:off x="5806440" y="3017520"/>
+            <a:ext cx="5852160" cy="731520"/>
+          </a:xfrm>
+          <a:prstGeom prst="roundRect">
+            <a:avLst>
+              <a:gd name="adj" fmla="val 15000"/>
+            </a:avLst>
+          </a:prstGeom>
+          <a:solidFill>
+            <a:srgbClr val="FFFFFF"/>
+          </a:solidFill>
+          <a:ln w="15875">
+            <a:solidFill>
+              <a:srgbClr val="D9DEE7"/>
+            </a:solidFill>
+            <a:prstDash val="solid"/>
+          </a:ln>
+        </p:spPr>
+      </p:sp>
+      <p:sp>
+        <p:nvSpPr>
+          <p:cNvPr id="16" name="Shape 14"/>
+          <p:cNvSpPr/>
+          <p:nvPr/>
+        </p:nvSpPr>
+        <p:spPr>
+          <a:xfrm>
+            <a:off x="6080760" y="3163824"/>
+            <a:ext cx="438912" cy="438912"/>
+          </a:xfrm>
+          <a:prstGeom prst="roundRect">
+            <a:avLst>
+              <a:gd name="adj" fmla="val 20833"/>
+            </a:avLst>
+          </a:prstGeom>
+          <a:solidFill>
+            <a:srgbClr val="EEF2FB"/>
+          </a:solidFill>
+          <a:ln/>
+        </p:spPr>
+      </p:sp>
+      <p:sp>
+        <p:nvSpPr>
+          <p:cNvPr id="17" name="Text 15"/>
+          <p:cNvSpPr txBox="1"/>
+          <p:nvPr/>
+        </p:nvSpPr>
+        <p:spPr>
+          <a:xfrm>
+            <a:off x="6080760" y="3163824"/>
+            <a:ext cx="438912" cy="438912"/>
+          </a:xfrm>
+          <a:prstGeom prst="rect">
+            <a:avLst/>
+          </a:prstGeom>
+          <a:noFill/>
+          <a:ln/>
+        </p:spPr>
+        <p:txBody>
+          <a:bodyPr wrap="square" lIns="0" tIns="0" rIns="0" bIns="0" rtlCol="0" anchor="ctr"/>
+          <a:lstStyle/>
+          <a:p>
+            <a:pPr algn="ctr" indent="0" marL="0">
+              <a:buNone/>
+            </a:pPr>
+            <a:r>
+              <a:rPr lang="en-US" sz="1300" b="1" dirty="0">
+                <a:solidFill>
+                  <a:srgbClr val="2D63FF"/>
+                </a:solidFill>
+                <a:latin typeface="IBM Plex Mono" pitchFamily="34" charset="0"/>
+                <a:ea typeface="IBM Plex Mono" pitchFamily="34" charset="-122"/>
+                <a:cs typeface="IBM Plex Mono" pitchFamily="34" charset="-120"/>
+              </a:rPr>
+              <a:t>B</a:t>
+            </a:r>
+            <a:endParaRPr lang="en-US" sz="1300" dirty="0"/>
+          </a:p>
+        </p:txBody>
+      </p:sp>
+      <p:sp>
+        <p:nvSpPr>
+          <p:cNvPr id="18" name="Text 16"/>
+          <p:cNvSpPr txBox="1"/>
+          <p:nvPr/>
+        </p:nvSpPr>
+        <p:spPr>
+          <a:xfrm>
+            <a:off x="6720840" y="3017520"/>
+            <a:ext cx="4754880" cy="731520"/>
+          </a:xfrm>
+          <a:prstGeom prst="rect">
+            <a:avLst/>
+          </a:prstGeom>
+          <a:noFill/>
+          <a:ln/>
+        </p:spPr>
+        <p:txBody>
+          <a:bodyPr wrap="square" lIns="0" tIns="0" rIns="0" bIns="0" rtlCol="0" anchor="ctr"/>
+          <a:lstStyle/>
+          <a:p>
+            <a:pPr indent="0" marL="0">
+              <a:lnSpc>
+                <a:spcPct val="115000"/>
+              </a:lnSpc>
+              <a:buNone/>
+            </a:pPr>
+            <a:r>
+              <a:rPr lang="en-US" sz="1700" dirty="0">
+                <a:solidFill>
+                  <a:srgbClr val="101828"/>
+                </a:solidFill>
+                <a:latin typeface="IBM Plex Sans" pitchFamily="34" charset="0"/>
+                <a:ea typeface="IBM Plex Sans" pitchFamily="34" charset="-122"/>
+                <a:cs typeface="IBM Plex Sans" pitchFamily="34" charset="-120"/>
+              </a:rPr>
+              <a:t>blue</a:t>
+            </a:r>
+            <a:endParaRPr lang="en-US" sz="1700" dirty="0"/>
+          </a:p>
+          <a:p>
+            <a:pPr indent="0" marL="0">
+              <a:lnSpc>
+                <a:spcPct val="115000"/>
+              </a:lnSpc>
+              <a:buNone/>
+            </a:pPr>
+            <a:r>
+              <a:rPr lang="en-US" sz="1700" dirty="0">
+                <a:solidFill>
+                  <a:srgbClr val="101828"/>
+                </a:solidFill>
+                <a:latin typeface="IBM Plex Sans" pitchFamily="34" charset="0"/>
+                <a:ea typeface="IBM Plex Sans" pitchFamily="34" charset="-122"/>
+                <a:cs typeface="IBM Plex Sans" pitchFamily="34" charset="-120"/>
+              </a:rPr>
+              <a:t>red</a:t>
+            </a:r>
+            <a:endParaRPr lang="en-US" sz="1700" dirty="0"/>
+          </a:p>
+        </p:txBody>
+      </p:sp>
+      <p:sp>
+        <p:nvSpPr>
+          <p:cNvPr id="19" name="Shape 17"/>
+          <p:cNvSpPr/>
+          <p:nvPr/>
+        </p:nvSpPr>
+        <p:spPr>
+          <a:xfrm>
+            <a:off x="5806440" y="3886200"/>
+            <a:ext cx="5852160" cy="731520"/>
+          </a:xfrm>
+          <a:prstGeom prst="roundRect">
+            <a:avLst>
+              <a:gd name="adj" fmla="val 15000"/>
+            </a:avLst>
+          </a:prstGeom>
+          <a:solidFill>
+            <a:srgbClr val="FFFFFF"/>
+          </a:solidFill>
+          <a:ln w="15875">
+            <a:solidFill>
+              <a:srgbClr val="D9DEE7"/>
+            </a:solidFill>
+            <a:prstDash val="solid"/>
+          </a:ln>
+        </p:spPr>
+      </p:sp>
+      <p:sp>
+        <p:nvSpPr>
+          <p:cNvPr id="20" name="Shape 18"/>
+          <p:cNvSpPr/>
+          <p:nvPr/>
+        </p:nvSpPr>
+        <p:spPr>
+          <a:xfrm>
+            <a:off x="6080760" y="4032504"/>
+            <a:ext cx="438912" cy="438912"/>
+          </a:xfrm>
+          <a:prstGeom prst="roundRect">
+            <a:avLst>
+              <a:gd name="adj" fmla="val 20833"/>
+            </a:avLst>
+          </a:prstGeom>
+          <a:solidFill>
+            <a:srgbClr val="EEF2FB"/>
+          </a:solidFill>
+          <a:ln/>
+        </p:spPr>
+      </p:sp>
+      <p:sp>
+        <p:nvSpPr>
+          <p:cNvPr id="21" name="Text 19"/>
+          <p:cNvSpPr txBox="1"/>
+          <p:nvPr/>
+        </p:nvSpPr>
+        <p:spPr>
+          <a:xfrm>
+            <a:off x="6080760" y="4032504"/>
+            <a:ext cx="438912" cy="438912"/>
+          </a:xfrm>
+          <a:prstGeom prst="rect">
+            <a:avLst/>
+          </a:prstGeom>
+          <a:noFill/>
+          <a:ln/>
+        </p:spPr>
+        <p:txBody>
+          <a:bodyPr wrap="square" lIns="0" tIns="0" rIns="0" bIns="0" rtlCol="0" anchor="ctr"/>
+          <a:lstStyle/>
+          <a:p>
+            <a:pPr algn="ctr" indent="0" marL="0">
+              <a:buNone/>
+            </a:pPr>
+            <a:r>
+              <a:rPr lang="en-US" sz="1300" b="1" dirty="0">
+                <a:solidFill>
+                  <a:srgbClr val="2D63FF"/>
+                </a:solidFill>
+                <a:latin typeface="IBM Plex Mono" pitchFamily="34" charset="0"/>
+                <a:ea typeface="IBM Plex Mono" pitchFamily="34" charset="-122"/>
+                <a:cs typeface="IBM Plex Mono" pitchFamily="34" charset="-120"/>
+              </a:rPr>
+              <a:t>C</a:t>
+            </a:r>
+            <a:endParaRPr lang="en-US" sz="1300" dirty="0"/>
+          </a:p>
+        </p:txBody>
+      </p:sp>
+      <p:sp>
+        <p:nvSpPr>
+          <p:cNvPr id="22" name="Text 20"/>
+          <p:cNvSpPr txBox="1"/>
+          <p:nvPr/>
+        </p:nvSpPr>
+        <p:spPr>
+          <a:xfrm>
+            <a:off x="6720840" y="3886200"/>
+            <a:ext cx="4754880" cy="731520"/>
+          </a:xfrm>
+          <a:prstGeom prst="rect">
+            <a:avLst/>
+          </a:prstGeom>
+          <a:noFill/>
+          <a:ln/>
+        </p:spPr>
+        <p:txBody>
+          <a:bodyPr wrap="square" lIns="0" tIns="0" rIns="0" bIns="0" rtlCol="0" anchor="ctr"/>
+          <a:lstStyle/>
+          <a:p>
+            <a:pPr indent="0" marL="0">
+              <a:lnSpc>
+                <a:spcPct val="115000"/>
+              </a:lnSpc>
+              <a:buNone/>
+            </a:pPr>
+            <a:r>
+              <a:rPr lang="en-US" sz="1700" dirty="0">
+                <a:solidFill>
+                  <a:srgbClr val="101828"/>
+                </a:solidFill>
+                <a:latin typeface="IBM Plex Sans" pitchFamily="34" charset="0"/>
+                <a:ea typeface="IBM Plex Sans" pitchFamily="34" charset="-122"/>
+                <a:cs typeface="IBM Plex Sans" pitchFamily="34" charset="-120"/>
+              </a:rPr>
+              <a:t>red</a:t>
+            </a:r>
+            <a:endParaRPr lang="en-US" sz="1700" dirty="0"/>
+          </a:p>
+          <a:p>
+            <a:pPr indent="0" marL="0">
+              <a:lnSpc>
+                <a:spcPct val="115000"/>
+              </a:lnSpc>
+              <a:buNone/>
+            </a:pPr>
+            <a:r>
+              <a:rPr lang="en-US" sz="1700" dirty="0">
+                <a:solidFill>
+                  <a:srgbClr val="101828"/>
+                </a:solidFill>
+                <a:latin typeface="IBM Plex Sans" pitchFamily="34" charset="0"/>
+                <a:ea typeface="IBM Plex Sans" pitchFamily="34" charset="-122"/>
+                <a:cs typeface="IBM Plex Sans" pitchFamily="34" charset="-120"/>
+              </a:rPr>
+              <a:t>blue</a:t>
+            </a:r>
+            <a:endParaRPr lang="en-US" sz="1700" dirty="0"/>
           </a:p>
         </p:txBody>
       </p:sp>
@@ -3281,14 +3890,75 @@
       </p:sp>
       <p:sp>
         <p:nvSpPr>
-          <p:cNvPr id="5" name="Text 3"/>
-          <p:cNvSpPr txBox="1"/>
-          <p:nvPr/>
-        </p:nvSpPr>
-        <p:spPr>
-          <a:xfrm>
-            <a:off x="502920" y="411480"/>
-            <a:ext cx="11155680" cy="777240"/>
+          <p:cNvPr id="5" name="Shape 3"/>
+          <p:cNvSpPr/>
+          <p:nvPr/>
+        </p:nvSpPr>
+        <p:spPr>
+          <a:xfrm>
+            <a:off x="502920" y="438912"/>
+            <a:ext cx="3108960" cy="502920"/>
+          </a:xfrm>
+          <a:prstGeom prst="roundRect">
+            <a:avLst>
+              <a:gd name="adj" fmla="val 18182"/>
+            </a:avLst>
+          </a:prstGeom>
+          <a:solidFill>
+            <a:srgbClr val="F4B942"/>
+          </a:solidFill>
+          <a:ln/>
+        </p:spPr>
+      </p:sp>
+      <p:sp>
+        <p:nvSpPr>
+          <p:cNvPr id="6" name="Text 4"/>
+          <p:cNvSpPr txBox="1"/>
+          <p:nvPr/>
+        </p:nvSpPr>
+        <p:spPr>
+          <a:xfrm>
+            <a:off x="502920" y="438912"/>
+            <a:ext cx="3108960" cy="502920"/>
+          </a:xfrm>
+          <a:prstGeom prst="rect">
+            <a:avLst/>
+          </a:prstGeom>
+          <a:noFill/>
+          <a:ln/>
+        </p:spPr>
+        <p:txBody>
+          <a:bodyPr wrap="square" lIns="0" tIns="0" rIns="0" bIns="0" rtlCol="0" anchor="ctr"/>
+          <a:lstStyle/>
+          <a:p>
+            <a:pPr algn="ctr" indent="0" marL="0">
+              <a:buNone/>
+            </a:pPr>
+            <a:r>
+              <a:rPr lang="en-US" sz="1300" b="1" dirty="0">
+                <a:solidFill>
+                  <a:srgbClr val="101828"/>
+                </a:solidFill>
+                <a:latin typeface="IBM Plex Mono" pitchFamily="34" charset="0"/>
+                <a:ea typeface="IBM Plex Mono" pitchFamily="34" charset="-122"/>
+                <a:cs typeface="IBM Plex Mono" pitchFamily="34" charset="-120"/>
+              </a:rPr>
+              <a:t>★  FINAL CHALLENGE</a:t>
+            </a:r>
+            <a:endParaRPr lang="en-US" sz="1300" dirty="0"/>
+          </a:p>
+        </p:txBody>
+      </p:sp>
+      <p:sp>
+        <p:nvSpPr>
+          <p:cNvPr id="7" name="Text 5"/>
+          <p:cNvSpPr txBox="1"/>
+          <p:nvPr/>
+        </p:nvSpPr>
+        <p:spPr>
+          <a:xfrm>
+            <a:off x="502920" y="1097280"/>
+            <a:ext cx="11155680" cy="731520"/>
           </a:xfrm>
           <a:prstGeom prst="rect">
             <a:avLst/>
@@ -3304,7 +3974,7 @@
               <a:buNone/>
             </a:pPr>
             <a:r>
-              <a:rPr lang="en-US" sz="3200" b="1" dirty="0">
+              <a:rPr lang="en-US" sz="3400" b="1" dirty="0">
                 <a:solidFill>
                   <a:srgbClr val="101828"/>
                 </a:solidFill>
@@ -3312,65 +3982,26 @@
                 <a:ea typeface="IBM Plex Sans" pitchFamily="34" charset="-122"/>
                 <a:cs typeface="IBM Plex Sans" pitchFamily="34" charset="-120"/>
               </a:rPr>
-              <a:t>Worth knowing</a:t>
-            </a:r>
-            <a:endParaRPr lang="en-US" sz="3200" dirty="0"/>
-          </a:p>
-        </p:txBody>
-      </p:sp>
-      <p:sp>
-        <p:nvSpPr>
-          <p:cNvPr id="6" name="Text 4"/>
-          <p:cNvSpPr txBox="1"/>
-          <p:nvPr/>
-        </p:nvSpPr>
-        <p:spPr>
-          <a:xfrm>
-            <a:off x="502920" y="1170432"/>
-            <a:ext cx="11155680" cy="411480"/>
-          </a:xfrm>
-          <a:prstGeom prst="rect">
-            <a:avLst/>
-          </a:prstGeom>
-          <a:noFill/>
-          <a:ln/>
-        </p:spPr>
-        <p:txBody>
-          <a:bodyPr wrap="square" lIns="0" tIns="0" rIns="0" bIns="0" rtlCol="0" anchor="ctr"/>
-          <a:lstStyle/>
-          <a:p>
-            <a:pPr indent="0" marL="0">
-              <a:buNone/>
-            </a:pPr>
-            <a:r>
-              <a:rPr lang="en-US" sz="1500" dirty="0">
-                <a:solidFill>
-                  <a:srgbClr val="667085"/>
-                </a:solidFill>
-                <a:latin typeface="IBM Plex Sans" pitchFamily="34" charset="0"/>
-                <a:ea typeface="IBM Plex Sans" pitchFamily="34" charset="-122"/>
-                <a:cs typeface="IBM Plex Sans" pitchFamily="34" charset="-120"/>
-              </a:rPr>
-              <a:t>The information markers dotted around the room</a:t>
-            </a:r>
-            <a:endParaRPr lang="en-US" sz="1500" dirty="0"/>
-          </a:p>
-        </p:txBody>
-      </p:sp>
-      <p:sp>
-        <p:nvSpPr>
-          <p:cNvPr id="7" name="Shape 5"/>
+              <a:t>Name the data type</a:t>
+            </a:r>
+            <a:endParaRPr lang="en-US" sz="3400" dirty="0"/>
+          </a:p>
+        </p:txBody>
+      </p:sp>
+      <p:sp>
+        <p:nvSpPr>
+          <p:cNvPr id="8" name="Shape 6"/>
           <p:cNvSpPr/>
           <p:nvPr/>
         </p:nvSpPr>
         <p:spPr>
           <a:xfrm>
-            <a:off x="502920" y="1828800"/>
-            <a:ext cx="5394960" cy="1737360"/>
+            <a:off x="502920" y="2011680"/>
+            <a:ext cx="11155680" cy="2194560"/>
           </a:xfrm>
           <a:prstGeom prst="roundRect">
             <a:avLst>
-              <a:gd name="adj" fmla="val 6316"/>
+              <a:gd name="adj" fmla="val 5000"/>
             </a:avLst>
           </a:prstGeom>
           <a:solidFill>
@@ -3386,14 +4017,14 @@
       </p:sp>
       <p:sp>
         <p:nvSpPr>
-          <p:cNvPr id="8" name="Text 6"/>
-          <p:cNvSpPr txBox="1"/>
-          <p:nvPr/>
-        </p:nvSpPr>
-        <p:spPr>
-          <a:xfrm>
-            <a:off x="822960" y="2011680"/>
-            <a:ext cx="4754880" cy="365760"/>
+          <p:cNvPr id="9" name="Text 7"/>
+          <p:cNvSpPr txBox="1"/>
+          <p:nvPr/>
+        </p:nvSpPr>
+        <p:spPr>
+          <a:xfrm>
+            <a:off x="1005840" y="2331720"/>
+            <a:ext cx="10149840" cy="1554480"/>
           </a:xfrm>
           <a:prstGeom prst="rect">
             <a:avLst/>
@@ -3406,52 +4037,52 @@
           <a:lstStyle/>
           <a:p>
             <a:pPr indent="0" marL="0">
-              <a:buNone/>
-            </a:pPr>
-            <a:r>
-              <a:rPr lang="en-US" sz="1600" b="1" dirty="0">
-                <a:solidFill>
-                  <a:srgbClr val="2D63FF"/>
+              <a:lnSpc>
+                <a:spcPct val="130000"/>
+              </a:lnSpc>
+              <a:buNone/>
+            </a:pPr>
+            <a:r>
+              <a:rPr lang="en-US" sz="2200" dirty="0">
+                <a:solidFill>
+                  <a:srgbClr val="101828"/>
                 </a:solidFill>
                 <a:latin typeface="IBM Plex Sans" pitchFamily="34" charset="0"/>
                 <a:ea typeface="IBM Plex Sans" pitchFamily="34" charset="-122"/>
                 <a:cs typeface="IBM Plex Sans" pitchFamily="34" charset="-120"/>
               </a:rPr>
-              <a:t>Start here: how this course works</a:t>
-            </a:r>
-            <a:endParaRPr lang="en-US" sz="1600" dirty="0"/>
-          </a:p>
-        </p:txBody>
-      </p:sp>
-      <p:sp>
-        <p:nvSpPr>
-          <p:cNvPr id="9" name="Text 7"/>
-          <p:cNvSpPr txBox="1"/>
-          <p:nvPr/>
-        </p:nvSpPr>
-        <p:spPr>
-          <a:xfrm>
-            <a:off x="822960" y="2395728"/>
-            <a:ext cx="4754880" cy="1005840"/>
-          </a:xfrm>
-          <a:prstGeom prst="rect">
-            <a:avLst/>
-          </a:prstGeom>
-          <a:noFill/>
-          <a:ln/>
-        </p:spPr>
-        <p:txBody>
-          <a:bodyPr wrap="square" lIns="0" tIns="0" rIns="0" bIns="0" rtlCol="0" anchor="t"/>
+              <a:t>Eight values are waiting on the floor below you. Tap the star and sort each one into the data type Python would store it as.</a:t>
+            </a:r>
+            <a:endParaRPr lang="en-US" sz="2200" dirty="0"/>
+          </a:p>
+        </p:txBody>
+      </p:sp>
+      <p:sp>
+        <p:nvSpPr>
+          <p:cNvPr id="10" name="Text 8"/>
+          <p:cNvSpPr txBox="1"/>
+          <p:nvPr/>
+        </p:nvSpPr>
+        <p:spPr>
+          <a:xfrm>
+            <a:off x="502920" y="4526280"/>
+            <a:ext cx="11155680" cy="457200"/>
+          </a:xfrm>
+          <a:prstGeom prst="rect">
+            <a:avLst/>
+          </a:prstGeom>
+          <a:noFill/>
+          <a:ln/>
+        </p:spPr>
+        <p:txBody>
+          <a:bodyPr wrap="square" lIns="0" tIns="0" rIns="0" bIns="0" rtlCol="0" anchor="ctr"/>
           <a:lstStyle/>
           <a:p>
             <a:pPr indent="0" marL="0">
-              <a:lnSpc>
-                <a:spcPct val="120000"/>
-              </a:lnSpc>
-              <a:buNone/>
-            </a:pPr>
-            <a:r>
-              <a:rPr lang="en-US" sz="1300" dirty="0">
+              <a:buNone/>
+            </a:pPr>
+            <a:r>
+              <a:rPr lang="en-US" sz="1600" dirty="0">
                 <a:solidFill>
                   <a:srgbClr val="667085"/>
                 </a:solidFill>
@@ -3459,333 +4090,9 @@
                 <a:ea typeface="IBM Plex Sans" pitchFamily="34" charset="-122"/>
                 <a:cs typeface="IBM Plex Sans" pitchFamily="34" charset="-120"/>
               </a:rPr>
-              <a:t>Python is a language for writing instructions a computer follows, one line at a time. You write them in the editor on the right of a task window. Run follows your instructions and shows whatever they display in the panel underneath, labelled Program output. Check my answer is different: it marks your program against the task. So run as often as you like while you are trying things out, and check when you think it is right. You can check as many times as you like, and your best mark is the one that is kept. You work through the course in order and complete every question: the next one opens when this one is finished, because each activity teaches what the next one needs. If you are stuck, the Hint button gives you one step at a time, starting with the idea and never with the answer, and Syntax reminder lists every Python command the course has taught so far. I need help is there from the first attempt on every question - it costs you nothing, and it will tell you to ask your teacher and show them the question and your code. Errors are a normal part of programming. Everyone writing Python sees them all day, and reading the message is how you find out what to change. Work round this room through the six numbered badges in order, then tap the star for the final challenge. A badge that says Later is not open yet: finish the one you are on first. Your progress saves after every answer, so you can stop and come back to the same question.</a:t>
-            </a:r>
-            <a:endParaRPr lang="en-US" sz="1300" dirty="0"/>
-          </a:p>
-        </p:txBody>
-      </p:sp>
-      <p:sp>
-        <p:nvSpPr>
-          <p:cNvPr id="10" name="Shape 8"/>
-          <p:cNvSpPr/>
-          <p:nvPr/>
-        </p:nvSpPr>
-        <p:spPr>
-          <a:xfrm>
-            <a:off x="6217920" y="1828800"/>
-            <a:ext cx="5394960" cy="1737360"/>
-          </a:xfrm>
-          <a:prstGeom prst="roundRect">
-            <a:avLst>
-              <a:gd name="adj" fmla="val 6316"/>
-            </a:avLst>
-          </a:prstGeom>
-          <a:solidFill>
-            <a:srgbClr val="FFFFFF"/>
-          </a:solidFill>
-          <a:ln w="15875">
-            <a:solidFill>
-              <a:srgbClr val="08A6A6"/>
-            </a:solidFill>
-            <a:prstDash val="solid"/>
-          </a:ln>
-        </p:spPr>
-      </p:sp>
-      <p:sp>
-        <p:nvSpPr>
-          <p:cNvPr id="11" name="Text 9"/>
-          <p:cNvSpPr txBox="1"/>
-          <p:nvPr/>
-        </p:nvSpPr>
-        <p:spPr>
-          <a:xfrm>
-            <a:off x="6537960" y="2011680"/>
-            <a:ext cx="4754880" cy="365760"/>
-          </a:xfrm>
-          <a:prstGeom prst="rect">
-            <a:avLst/>
-          </a:prstGeom>
-          <a:noFill/>
-          <a:ln/>
-        </p:spPr>
-        <p:txBody>
-          <a:bodyPr wrap="square" lIns="0" tIns="0" rIns="0" bIns="0" rtlCol="0" anchor="ctr"/>
-          <a:lstStyle/>
-          <a:p>
-            <a:pPr indent="0" marL="0">
-              <a:buNone/>
-            </a:pPr>
-            <a:r>
-              <a:rPr lang="en-US" sz="1600" b="1" dirty="0">
-                <a:solidFill>
-                  <a:srgbClr val="08A6A6"/>
-                </a:solidFill>
-                <a:latin typeface="IBM Plex Sans" pitchFamily="34" charset="0"/>
-                <a:ea typeface="IBM Plex Sans" pitchFamily="34" charset="-122"/>
-                <a:cs typeface="IBM Plex Sans" pitchFamily="34" charset="-120"/>
-              </a:rPr>
-              <a:t>Naming rules</a:t>
+              <a:t>Predict on paper first, then look down and test it.</a:t>
             </a:r>
             <a:endParaRPr lang="en-US" sz="1600" dirty="0"/>
-          </a:p>
-        </p:txBody>
-      </p:sp>
-      <p:sp>
-        <p:nvSpPr>
-          <p:cNvPr id="12" name="Text 10"/>
-          <p:cNvSpPr txBox="1"/>
-          <p:nvPr/>
-        </p:nvSpPr>
-        <p:spPr>
-          <a:xfrm>
-            <a:off x="6537960" y="2395728"/>
-            <a:ext cx="4754880" cy="1005840"/>
-          </a:xfrm>
-          <a:prstGeom prst="rect">
-            <a:avLst/>
-          </a:prstGeom>
-          <a:noFill/>
-          <a:ln/>
-        </p:spPr>
-        <p:txBody>
-          <a:bodyPr wrap="square" lIns="0" tIns="0" rIns="0" bIns="0" rtlCol="0" anchor="t"/>
-          <a:lstStyle/>
-          <a:p>
-            <a:pPr indent="0" marL="0">
-              <a:lnSpc>
-                <a:spcPct val="120000"/>
-              </a:lnSpc>
-              <a:buNone/>
-            </a:pPr>
-            <a:r>
-              <a:rPr lang="en-US" sz="1300" dirty="0">
-                <a:solidFill>
-                  <a:srgbClr val="667085"/>
-                </a:solidFill>
-                <a:latin typeface="IBM Plex Sans" pitchFamily="34" charset="0"/>
-                <a:ea typeface="IBM Plex Sans" pitchFamily="34" charset="-122"/>
-                <a:cs typeface="IBM Plex Sans" pitchFamily="34" charset="-120"/>
-              </a:rPr>
-              <a:t>A Python variable name can hold letters, digits and underscores, but it cannot start with a digit or contain a space. Capitals are used for the name of a constant, so a reader can see at a glance that the value is not meant to change.</a:t>
-            </a:r>
-            <a:endParaRPr lang="en-US" sz="1300" dirty="0"/>
-          </a:p>
-        </p:txBody>
-      </p:sp>
-      <p:sp>
-        <p:nvSpPr>
-          <p:cNvPr id="13" name="Shape 11"/>
-          <p:cNvSpPr/>
-          <p:nvPr/>
-        </p:nvSpPr>
-        <p:spPr>
-          <a:xfrm>
-            <a:off x="502920" y="3794760"/>
-            <a:ext cx="5394960" cy="1737360"/>
-          </a:xfrm>
-          <a:prstGeom prst="roundRect">
-            <a:avLst>
-              <a:gd name="adj" fmla="val 6316"/>
-            </a:avLst>
-          </a:prstGeom>
-          <a:solidFill>
-            <a:srgbClr val="FFFFFF"/>
-          </a:solidFill>
-          <a:ln w="15875">
-            <a:solidFill>
-              <a:srgbClr val="2D63FF"/>
-            </a:solidFill>
-            <a:prstDash val="solid"/>
-          </a:ln>
-        </p:spPr>
-      </p:sp>
-      <p:sp>
-        <p:nvSpPr>
-          <p:cNvPr id="14" name="Text 12"/>
-          <p:cNvSpPr txBox="1"/>
-          <p:nvPr/>
-        </p:nvSpPr>
-        <p:spPr>
-          <a:xfrm>
-            <a:off x="822960" y="3977640"/>
-            <a:ext cx="4754880" cy="365760"/>
-          </a:xfrm>
-          <a:prstGeom prst="rect">
-            <a:avLst/>
-          </a:prstGeom>
-          <a:noFill/>
-          <a:ln/>
-        </p:spPr>
-        <p:txBody>
-          <a:bodyPr wrap="square" lIns="0" tIns="0" rIns="0" bIns="0" rtlCol="0" anchor="ctr"/>
-          <a:lstStyle/>
-          <a:p>
-            <a:pPr indent="0" marL="0">
-              <a:buNone/>
-            </a:pPr>
-            <a:r>
-              <a:rPr lang="en-US" sz="1600" b="1" dirty="0">
-                <a:solidFill>
-                  <a:srgbClr val="2D63FF"/>
-                </a:solidFill>
-                <a:latin typeface="IBM Plex Sans" pitchFamily="34" charset="0"/>
-                <a:ea typeface="IBM Plex Sans" pitchFamily="34" charset="-122"/>
-                <a:cs typeface="IBM Plex Sans" pitchFamily="34" charset="-120"/>
-              </a:rPr>
-              <a:t>Why it waits</a:t>
-            </a:r>
-            <a:endParaRPr lang="en-US" sz="1600" dirty="0"/>
-          </a:p>
-        </p:txBody>
-      </p:sp>
-      <p:sp>
-        <p:nvSpPr>
-          <p:cNvPr id="15" name="Text 13"/>
-          <p:cNvSpPr txBox="1"/>
-          <p:nvPr/>
-        </p:nvSpPr>
-        <p:spPr>
-          <a:xfrm>
-            <a:off x="822960" y="4361688"/>
-            <a:ext cx="4754880" cy="1005840"/>
-          </a:xfrm>
-          <a:prstGeom prst="rect">
-            <a:avLst/>
-          </a:prstGeom>
-          <a:noFill/>
-          <a:ln/>
-        </p:spPr>
-        <p:txBody>
-          <a:bodyPr wrap="square" lIns="0" tIns="0" rIns="0" bIns="0" rtlCol="0" anchor="t"/>
-          <a:lstStyle/>
-          <a:p>
-            <a:pPr indent="0" marL="0">
-              <a:lnSpc>
-                <a:spcPct val="120000"/>
-              </a:lnSpc>
-              <a:buNone/>
-            </a:pPr>
-            <a:r>
-              <a:rPr lang="en-US" sz="1300" dirty="0">
-                <a:solidFill>
-                  <a:srgbClr val="667085"/>
-                </a:solidFill>
-                <a:latin typeface="IBM Plex Sans" pitchFamily="34" charset="0"/>
-                <a:ea typeface="IBM Plex Sans" pitchFamily="34" charset="-122"/>
-                <a:cs typeface="IBM Plex Sans" pitchFamily="34" charset="-120"/>
-              </a:rPr>
-              <a:t>input() reads one whole line, so the program only carries on once the Enter key has been pressed. Nothing else happens while it waits.</a:t>
-            </a:r>
-            <a:endParaRPr lang="en-US" sz="1300" dirty="0"/>
-          </a:p>
-        </p:txBody>
-      </p:sp>
-      <p:sp>
-        <p:nvSpPr>
-          <p:cNvPr id="16" name="Shape 14"/>
-          <p:cNvSpPr/>
-          <p:nvPr/>
-        </p:nvSpPr>
-        <p:spPr>
-          <a:xfrm>
-            <a:off x="6217920" y="3794760"/>
-            <a:ext cx="5394960" cy="1737360"/>
-          </a:xfrm>
-          <a:prstGeom prst="roundRect">
-            <a:avLst>
-              <a:gd name="adj" fmla="val 6316"/>
-            </a:avLst>
-          </a:prstGeom>
-          <a:solidFill>
-            <a:srgbClr val="FFFFFF"/>
-          </a:solidFill>
-          <a:ln w="15875">
-            <a:solidFill>
-              <a:srgbClr val="08A6A6"/>
-            </a:solidFill>
-            <a:prstDash val="solid"/>
-          </a:ln>
-        </p:spPr>
-      </p:sp>
-      <p:sp>
-        <p:nvSpPr>
-          <p:cNvPr id="17" name="Text 15"/>
-          <p:cNvSpPr txBox="1"/>
-          <p:nvPr/>
-        </p:nvSpPr>
-        <p:spPr>
-          <a:xfrm>
-            <a:off x="6537960" y="3977640"/>
-            <a:ext cx="4754880" cy="365760"/>
-          </a:xfrm>
-          <a:prstGeom prst="rect">
-            <a:avLst/>
-          </a:prstGeom>
-          <a:noFill/>
-          <a:ln/>
-        </p:spPr>
-        <p:txBody>
-          <a:bodyPr wrap="square" lIns="0" tIns="0" rIns="0" bIns="0" rtlCol="0" anchor="ctr"/>
-          <a:lstStyle/>
-          <a:p>
-            <a:pPr indent="0" marL="0">
-              <a:buNone/>
-            </a:pPr>
-            <a:r>
-              <a:rPr lang="en-US" sz="1600" b="1" dirty="0">
-                <a:solidFill>
-                  <a:srgbClr val="08A6A6"/>
-                </a:solidFill>
-                <a:latin typeface="IBM Plex Sans" pitchFamily="34" charset="0"/>
-                <a:ea typeface="IBM Plex Sans" pitchFamily="34" charset="-122"/>
-                <a:cs typeface="IBM Plex Sans" pitchFamily="34" charset="-120"/>
-              </a:rPr>
-              <a:t>One bit each</a:t>
-            </a:r>
-            <a:endParaRPr lang="en-US" sz="1600" dirty="0"/>
-          </a:p>
-        </p:txBody>
-      </p:sp>
-      <p:sp>
-        <p:nvSpPr>
-          <p:cNvPr id="18" name="Text 16"/>
-          <p:cNvSpPr txBox="1"/>
-          <p:nvPr/>
-        </p:nvSpPr>
-        <p:spPr>
-          <a:xfrm>
-            <a:off x="6537960" y="4361688"/>
-            <a:ext cx="4754880" cy="1005840"/>
-          </a:xfrm>
-          <a:prstGeom prst="rect">
-            <a:avLst/>
-          </a:prstGeom>
-          <a:noFill/>
-          <a:ln/>
-        </p:spPr>
-        <p:txBody>
-          <a:bodyPr wrap="square" lIns="0" tIns="0" rIns="0" bIns="0" rtlCol="0" anchor="t"/>
-          <a:lstStyle/>
-          <a:p>
-            <a:pPr indent="0" marL="0">
-              <a:lnSpc>
-                <a:spcPct val="120000"/>
-              </a:lnSpc>
-              <a:buNone/>
-            </a:pPr>
-            <a:r>
-              <a:rPr lang="en-US" sz="1300" dirty="0">
-                <a:solidFill>
-                  <a:srgbClr val="667085"/>
-                </a:solidFill>
-                <a:latin typeface="IBM Plex Sans" pitchFamily="34" charset="0"/>
-                <a:ea typeface="IBM Plex Sans" pitchFamily="34" charset="-122"/>
-                <a:cs typeface="IBM Plex Sans" pitchFamily="34" charset="-120"/>
-              </a:rPr>
-              <a:t>A boolean has only two possible values, so it needs just one bit of storage - the smallest piece of data there is.</a:t>
-            </a:r>
-            <a:endParaRPr lang="en-US" sz="1300" dirty="0"/>
           </a:p>
         </p:txBody>
       </p:sp>
@@ -3952,7 +4259,7 @@
                 <a:ea typeface="IBM Plex Sans" pitchFamily="34" charset="-122"/>
                 <a:cs typeface="IBM Plex Sans" pitchFamily="34" charset="-120"/>
               </a:rPr>
-              <a:t>Exam practice</a:t>
+              <a:t>Worth knowing</a:t>
             </a:r>
             <a:endParaRPr lang="en-US" sz="3200" dirty="0"/>
           </a:p>
@@ -3991,7 +4298,7 @@
                 <a:ea typeface="IBM Plex Sans" pitchFamily="34" charset="-122"/>
                 <a:cs typeface="IBM Plex Sans" pitchFamily="34" charset="-120"/>
               </a:rPr>
-              <a:t>Devices away. Answer from memory on the worksheet.</a:t>
+              <a:t>The information markers dotted around the room</a:t>
             </a:r>
             <a:endParaRPr lang="en-US" sz="1500" dirty="0"/>
           </a:p>
@@ -4006,11 +4313,11 @@
         <p:spPr>
           <a:xfrm>
             <a:off x="502920" y="1828800"/>
-            <a:ext cx="11155680" cy="1097280"/>
+            <a:ext cx="5394960" cy="1737360"/>
           </a:xfrm>
           <a:prstGeom prst="roundRect">
             <a:avLst>
-              <a:gd name="adj" fmla="val 10000"/>
+              <a:gd name="adj" fmla="val 6316"/>
             </a:avLst>
           </a:prstGeom>
           <a:solidFill>
@@ -4018,7 +4325,7 @@
           </a:solidFill>
           <a:ln w="15875">
             <a:solidFill>
-              <a:srgbClr val="D9DEE7"/>
+              <a:srgbClr val="2D63FF"/>
             </a:solidFill>
             <a:prstDash val="solid"/>
           </a:ln>
@@ -4032,8 +4339,8 @@
         </p:nvSpPr>
         <p:spPr>
           <a:xfrm>
-            <a:off x="914400" y="1938528"/>
-            <a:ext cx="9418320" cy="877824"/>
+            <a:off x="822960" y="2011680"/>
+            <a:ext cx="4754880" cy="365760"/>
           </a:xfrm>
           <a:prstGeom prst="rect">
             <a:avLst/>
@@ -4046,390 +4353,79 @@
           <a:lstStyle/>
           <a:p>
             <a:pPr indent="0" marL="0">
-              <a:lnSpc>
-                <a:spcPct val="118000"/>
-              </a:lnSpc>
-              <a:buNone/>
-            </a:pPr>
-            <a:r>
-              <a:rPr lang="en-US" sz="1700" dirty="0">
-                <a:solidFill>
-                  <a:srgbClr val="101828"/>
+              <a:buNone/>
+            </a:pPr>
+            <a:r>
+              <a:rPr lang="en-US" sz="1600" b="1" dirty="0">
+                <a:solidFill>
+                  <a:srgbClr val="2D63FF"/>
                 </a:solidFill>
                 <a:latin typeface="IBM Plex Sans" pitchFamily="34" charset="0"/>
                 <a:ea typeface="IBM Plex Sans" pitchFamily="34" charset="-122"/>
                 <a:cs typeface="IBM Plex Sans" pitchFamily="34" charset="-120"/>
               </a:rPr>
-              <a:t>A pupil writes two lines to add 1 to a number that has been typed in: </a:t>
-            </a:r>
+              <a:t>Start here: how this course works</a:t>
+            </a:r>
+            <a:endParaRPr lang="en-US" sz="1600" dirty="0"/>
+          </a:p>
+        </p:txBody>
+      </p:sp>
+      <p:sp>
+        <p:nvSpPr>
+          <p:cNvPr id="9" name="Text 7"/>
+          <p:cNvSpPr txBox="1"/>
+          <p:nvPr/>
+        </p:nvSpPr>
+        <p:spPr>
+          <a:xfrm>
+            <a:off x="822960" y="2395728"/>
+            <a:ext cx="4754880" cy="1005840"/>
+          </a:xfrm>
+          <a:prstGeom prst="rect">
+            <a:avLst/>
+          </a:prstGeom>
+          <a:noFill/>
+          <a:ln/>
+        </p:spPr>
+        <p:txBody>
+          <a:bodyPr wrap="square" lIns="0" tIns="0" rIns="0" bIns="0" rtlCol="0" anchor="t"/>
+          <a:lstStyle/>
+          <a:p>
             <a:pPr indent="0" marL="0">
               <a:lnSpc>
-                <a:spcPct val="118000"/>
+                <a:spcPct val="120000"/>
               </a:lnSpc>
               <a:buNone/>
             </a:pPr>
             <a:r>
-              <a:rPr lang="en-US" sz="1700" dirty="0">
-                <a:solidFill>
-                  <a:srgbClr val="18181B"/>
-                </a:solidFill>
-                <a:latin typeface="IBM Plex Mono" pitchFamily="34" charset="0"/>
-                <a:ea typeface="IBM Plex Mono" pitchFamily="34" charset="-122"/>
-                <a:cs typeface="IBM Plex Mono" pitchFamily="34" charset="-120"/>
-              </a:rPr>
-              <a:t>n</a:t>
-            </a:r>
-            <a:pPr indent="0" marL="0">
-              <a:lnSpc>
-                <a:spcPct val="118000"/>
-              </a:lnSpc>
-              <a:buNone/>
-            </a:pPr>
-            <a:r>
-              <a:rPr lang="en-US" sz="1700" dirty="0">
-                <a:solidFill>
-                  <a:srgbClr val="18181B"/>
-                </a:solidFill>
-                <a:latin typeface="IBM Plex Mono" pitchFamily="34" charset="0"/>
-                <a:ea typeface="IBM Plex Mono" pitchFamily="34" charset="-122"/>
-                <a:cs typeface="IBM Plex Mono" pitchFamily="34" charset="-120"/>
-              </a:rPr>
-              <a:t> </a:t>
-            </a:r>
-            <a:pPr indent="0" marL="0">
-              <a:lnSpc>
-                <a:spcPct val="118000"/>
-              </a:lnSpc>
-              <a:buNone/>
-            </a:pPr>
-            <a:r>
-              <a:rPr lang="en-US" sz="1700" dirty="0">
-                <a:solidFill>
-                  <a:srgbClr val="3F3F46"/>
-                </a:solidFill>
-                <a:latin typeface="IBM Plex Mono" pitchFamily="34" charset="0"/>
-                <a:ea typeface="IBM Plex Mono" pitchFamily="34" charset="-122"/>
-                <a:cs typeface="IBM Plex Mono" pitchFamily="34" charset="-120"/>
-              </a:rPr>
-              <a:t>=</a:t>
-            </a:r>
-            <a:pPr indent="0" marL="0">
-              <a:lnSpc>
-                <a:spcPct val="118000"/>
-              </a:lnSpc>
-              <a:buNone/>
-            </a:pPr>
-            <a:r>
-              <a:rPr lang="en-US" sz="1700" dirty="0">
-                <a:solidFill>
-                  <a:srgbClr val="18181B"/>
-                </a:solidFill>
-                <a:latin typeface="IBM Plex Mono" pitchFamily="34" charset="0"/>
-                <a:ea typeface="IBM Plex Mono" pitchFamily="34" charset="-122"/>
-                <a:cs typeface="IBM Plex Mono" pitchFamily="34" charset="-120"/>
-              </a:rPr>
-              <a:t> </a:t>
-            </a:r>
-            <a:pPr indent="0" marL="0">
-              <a:lnSpc>
-                <a:spcPct val="118000"/>
-              </a:lnSpc>
-              <a:buNone/>
-            </a:pPr>
-            <a:r>
-              <a:rPr lang="en-US" sz="1700" dirty="0">
-                <a:solidFill>
-                  <a:srgbClr val="1D4ED8"/>
-                </a:solidFill>
-                <a:latin typeface="IBM Plex Mono" pitchFamily="34" charset="0"/>
-                <a:ea typeface="IBM Plex Mono" pitchFamily="34" charset="-122"/>
-                <a:cs typeface="IBM Plex Mono" pitchFamily="34" charset="-120"/>
-              </a:rPr>
-              <a:t>input</a:t>
-            </a:r>
-            <a:pPr indent="0" marL="0">
-              <a:lnSpc>
-                <a:spcPct val="118000"/>
-              </a:lnSpc>
-              <a:buNone/>
-            </a:pPr>
-            <a:r>
-              <a:rPr lang="en-US" sz="1700" dirty="0">
-                <a:solidFill>
-                  <a:srgbClr val="3F3F46"/>
-                </a:solidFill>
-                <a:latin typeface="IBM Plex Mono" pitchFamily="34" charset="0"/>
-                <a:ea typeface="IBM Plex Mono" pitchFamily="34" charset="-122"/>
-                <a:cs typeface="IBM Plex Mono" pitchFamily="34" charset="-120"/>
-              </a:rPr>
-              <a:t>(</a:t>
-            </a:r>
-            <a:pPr indent="0" marL="0">
-              <a:lnSpc>
-                <a:spcPct val="118000"/>
-              </a:lnSpc>
-              <a:buNone/>
-            </a:pPr>
-            <a:r>
-              <a:rPr lang="en-US" sz="1700" dirty="0">
-                <a:solidFill>
-                  <a:srgbClr val="3F3F46"/>
-                </a:solidFill>
-                <a:latin typeface="IBM Plex Mono" pitchFamily="34" charset="0"/>
-                <a:ea typeface="IBM Plex Mono" pitchFamily="34" charset="-122"/>
-                <a:cs typeface="IBM Plex Mono" pitchFamily="34" charset="-120"/>
-              </a:rPr>
-              <a:t>)</a:t>
-            </a:r>
-            <a:pPr indent="0" marL="0">
-              <a:lnSpc>
-                <a:spcPct val="118000"/>
-              </a:lnSpc>
-              <a:buNone/>
-            </a:pPr>
-            <a:r>
-              <a:rPr lang="en-US" sz="1700" dirty="0">
-                <a:solidFill>
-                  <a:srgbClr val="101828"/>
+              <a:rPr lang="en-US" sz="1300" dirty="0">
+                <a:solidFill>
+                  <a:srgbClr val="667085"/>
                 </a:solidFill>
                 <a:latin typeface="IBM Plex Sans" pitchFamily="34" charset="0"/>
                 <a:ea typeface="IBM Plex Sans" pitchFamily="34" charset="-122"/>
                 <a:cs typeface="IBM Plex Sans" pitchFamily="34" charset="-120"/>
               </a:rPr>
-              <a:t> and then </a:t>
-            </a:r>
-            <a:pPr indent="0" marL="0">
-              <a:lnSpc>
-                <a:spcPct val="118000"/>
-              </a:lnSpc>
-              <a:buNone/>
-            </a:pPr>
-            <a:r>
-              <a:rPr lang="en-US" sz="1700" dirty="0">
-                <a:solidFill>
-                  <a:srgbClr val="1D4ED8"/>
-                </a:solidFill>
-                <a:latin typeface="IBM Plex Mono" pitchFamily="34" charset="0"/>
-                <a:ea typeface="IBM Plex Mono" pitchFamily="34" charset="-122"/>
-                <a:cs typeface="IBM Plex Mono" pitchFamily="34" charset="-120"/>
-              </a:rPr>
-              <a:t>print</a:t>
-            </a:r>
-            <a:pPr indent="0" marL="0">
-              <a:lnSpc>
-                <a:spcPct val="118000"/>
-              </a:lnSpc>
-              <a:buNone/>
-            </a:pPr>
-            <a:r>
-              <a:rPr lang="en-US" sz="1700" dirty="0">
-                <a:solidFill>
-                  <a:srgbClr val="3F3F46"/>
-                </a:solidFill>
-                <a:latin typeface="IBM Plex Mono" pitchFamily="34" charset="0"/>
-                <a:ea typeface="IBM Plex Mono" pitchFamily="34" charset="-122"/>
-                <a:cs typeface="IBM Plex Mono" pitchFamily="34" charset="-120"/>
-              </a:rPr>
-              <a:t>(</a:t>
-            </a:r>
-            <a:pPr indent="0" marL="0">
-              <a:lnSpc>
-                <a:spcPct val="118000"/>
-              </a:lnSpc>
-              <a:buNone/>
-            </a:pPr>
-            <a:r>
-              <a:rPr lang="en-US" sz="1700" dirty="0">
-                <a:solidFill>
-                  <a:srgbClr val="18181B"/>
-                </a:solidFill>
-                <a:latin typeface="IBM Plex Mono" pitchFamily="34" charset="0"/>
-                <a:ea typeface="IBM Plex Mono" pitchFamily="34" charset="-122"/>
-                <a:cs typeface="IBM Plex Mono" pitchFamily="34" charset="-120"/>
-              </a:rPr>
-              <a:t>n</a:t>
-            </a:r>
-            <a:pPr indent="0" marL="0">
-              <a:lnSpc>
-                <a:spcPct val="118000"/>
-              </a:lnSpc>
-              <a:buNone/>
-            </a:pPr>
-            <a:r>
-              <a:rPr lang="en-US" sz="1700" dirty="0">
-                <a:solidFill>
-                  <a:srgbClr val="18181B"/>
-                </a:solidFill>
-                <a:latin typeface="IBM Plex Mono" pitchFamily="34" charset="0"/>
-                <a:ea typeface="IBM Plex Mono" pitchFamily="34" charset="-122"/>
-                <a:cs typeface="IBM Plex Mono" pitchFamily="34" charset="-120"/>
-              </a:rPr>
-              <a:t> </a:t>
-            </a:r>
-            <a:pPr indent="0" marL="0">
-              <a:lnSpc>
-                <a:spcPct val="118000"/>
-              </a:lnSpc>
-              <a:buNone/>
-            </a:pPr>
-            <a:r>
-              <a:rPr lang="en-US" sz="1700" dirty="0">
-                <a:solidFill>
-                  <a:srgbClr val="3F3F46"/>
-                </a:solidFill>
-                <a:latin typeface="IBM Plex Mono" pitchFamily="34" charset="0"/>
-                <a:ea typeface="IBM Plex Mono" pitchFamily="34" charset="-122"/>
-                <a:cs typeface="IBM Plex Mono" pitchFamily="34" charset="-120"/>
-              </a:rPr>
-              <a:t>+</a:t>
-            </a:r>
-            <a:pPr indent="0" marL="0">
-              <a:lnSpc>
-                <a:spcPct val="118000"/>
-              </a:lnSpc>
-              <a:buNone/>
-            </a:pPr>
-            <a:r>
-              <a:rPr lang="en-US" sz="1700" dirty="0">
-                <a:solidFill>
-                  <a:srgbClr val="18181B"/>
-                </a:solidFill>
-                <a:latin typeface="IBM Plex Mono" pitchFamily="34" charset="0"/>
-                <a:ea typeface="IBM Plex Mono" pitchFamily="34" charset="-122"/>
-                <a:cs typeface="IBM Plex Mono" pitchFamily="34" charset="-120"/>
-              </a:rPr>
-              <a:t> </a:t>
-            </a:r>
-            <a:pPr indent="0" marL="0">
-              <a:lnSpc>
-                <a:spcPct val="118000"/>
-              </a:lnSpc>
-              <a:buNone/>
-            </a:pPr>
-            <a:r>
-              <a:rPr lang="en-US" sz="1700" dirty="0">
-                <a:solidFill>
-                  <a:srgbClr val="9A3412"/>
-                </a:solidFill>
-                <a:latin typeface="IBM Plex Mono" pitchFamily="34" charset="0"/>
-                <a:ea typeface="IBM Plex Mono" pitchFamily="34" charset="-122"/>
-                <a:cs typeface="IBM Plex Mono" pitchFamily="34" charset="-120"/>
-              </a:rPr>
-              <a:t>1</a:t>
-            </a:r>
-            <a:pPr indent="0" marL="0">
-              <a:lnSpc>
-                <a:spcPct val="118000"/>
-              </a:lnSpc>
-              <a:buNone/>
-            </a:pPr>
-            <a:r>
-              <a:rPr lang="en-US" sz="1700" dirty="0">
-                <a:solidFill>
-                  <a:srgbClr val="3F3F46"/>
-                </a:solidFill>
-                <a:latin typeface="IBM Plex Mono" pitchFamily="34" charset="0"/>
-                <a:ea typeface="IBM Plex Mono" pitchFamily="34" charset="-122"/>
-                <a:cs typeface="IBM Plex Mono" pitchFamily="34" charset="-120"/>
-              </a:rPr>
-              <a:t>)</a:t>
-            </a:r>
-            <a:pPr indent="0" marL="0">
-              <a:lnSpc>
-                <a:spcPct val="118000"/>
-              </a:lnSpc>
-              <a:buNone/>
-            </a:pPr>
-            <a:r>
-              <a:rPr lang="en-US" sz="1700" dirty="0">
-                <a:solidFill>
-                  <a:srgbClr val="101828"/>
-                </a:solidFill>
-                <a:latin typeface="IBM Plex Sans" pitchFamily="34" charset="0"/>
-                <a:ea typeface="IBM Plex Sans" pitchFamily="34" charset="-122"/>
-                <a:cs typeface="IBM Plex Sans" pitchFamily="34" charset="-120"/>
-              </a:rPr>
-              <a:t>. State what Python does when these two lines run, and rewrite them so that they work.</a:t>
-            </a:r>
-            <a:endParaRPr lang="en-US" sz="1700" dirty="0"/>
-          </a:p>
-        </p:txBody>
-      </p:sp>
-      <p:sp>
-        <p:nvSpPr>
-          <p:cNvPr id="9" name="Shape 7"/>
+              <a:t>Python is a language for writing instructions a computer follows, one line at a time. You write them in the editor on the right of a task window. Run follows your instructions and shows whatever they display in the panel underneath, labelled Program output. Check my answer is different: it marks your program against the task. So run as often as you like while you are trying things out, and check when you think it is right. You can check as many times as you like, and your best mark is the one that is kept. You work through the course in order and complete every question: the next one opens when this one is finished, because each activity teaches what the next one needs. If you are stuck, the Hint button gives you one step at a time, starting with the idea and never with the answer, and Syntax reminder lists every Python command the course has taught so far. I need help is there from the first attempt on every question - it costs you nothing, and it will tell you to ask your teacher and show them the question and your code. Errors are a normal part of programming. Everyone writing Python sees them all day, and reading the message is how you find out what to change. Work round this room through the six numbered badges in order, then tap the star for the final challenge. A badge that says Later is not open yet: finish the one you are on first. Your progress saves after every answer, so you can stop and come back to the same question.</a:t>
+            </a:r>
+            <a:endParaRPr lang="en-US" sz="1300" dirty="0"/>
+          </a:p>
+        </p:txBody>
+      </p:sp>
+      <p:sp>
+        <p:nvSpPr>
+          <p:cNvPr id="10" name="Shape 8"/>
           <p:cNvSpPr/>
           <p:nvPr/>
         </p:nvSpPr>
         <p:spPr>
           <a:xfrm>
-            <a:off x="10515600" y="2130552"/>
-            <a:ext cx="868680" cy="493776"/>
+            <a:off x="6217920" y="1828800"/>
+            <a:ext cx="5394960" cy="1737360"/>
           </a:xfrm>
           <a:prstGeom prst="roundRect">
             <a:avLst>
-              <a:gd name="adj" fmla="val 18519"/>
-            </a:avLst>
-          </a:prstGeom>
-          <a:solidFill>
-            <a:srgbClr val="EEF2FB"/>
-          </a:solidFill>
-          <a:ln/>
-        </p:spPr>
-      </p:sp>
-      <p:sp>
-        <p:nvSpPr>
-          <p:cNvPr id="10" name="Text 8"/>
-          <p:cNvSpPr txBox="1"/>
-          <p:nvPr/>
-        </p:nvSpPr>
-        <p:spPr>
-          <a:xfrm>
-            <a:off x="10515600" y="2130552"/>
-            <a:ext cx="868680" cy="493776"/>
-          </a:xfrm>
-          <a:prstGeom prst="rect">
-            <a:avLst/>
-          </a:prstGeom>
-          <a:noFill/>
-          <a:ln/>
-        </p:spPr>
-        <p:txBody>
-          <a:bodyPr wrap="square" lIns="0" tIns="0" rIns="0" bIns="0" rtlCol="0" anchor="ctr"/>
-          <a:lstStyle/>
-          <a:p>
-            <a:pPr algn="ctr" indent="0" marL="0">
-              <a:buNone/>
-            </a:pPr>
-            <a:r>
-              <a:rPr lang="en-US" sz="1500" b="1" dirty="0">
-                <a:solidFill>
-                  <a:srgbClr val="2D63FF"/>
-                </a:solidFill>
-                <a:latin typeface="IBM Plex Mono" pitchFamily="34" charset="0"/>
-                <a:ea typeface="IBM Plex Mono" pitchFamily="34" charset="-122"/>
-                <a:cs typeface="IBM Plex Mono" pitchFamily="34" charset="-120"/>
-              </a:rPr>
-              <a:t>[3]</a:t>
-            </a:r>
-            <a:endParaRPr lang="en-US" sz="1500" dirty="0"/>
-          </a:p>
-        </p:txBody>
-      </p:sp>
-      <p:sp>
-        <p:nvSpPr>
-          <p:cNvPr id="11" name="Shape 9"/>
-          <p:cNvSpPr/>
-          <p:nvPr/>
-        </p:nvSpPr>
-        <p:spPr>
-          <a:xfrm>
-            <a:off x="502920" y="3127248"/>
-            <a:ext cx="11155680" cy="1097280"/>
-          </a:xfrm>
-          <a:prstGeom prst="roundRect">
-            <a:avLst>
-              <a:gd name="adj" fmla="val 10000"/>
+              <a:gd name="adj" fmla="val 6316"/>
             </a:avLst>
           </a:prstGeom>
           <a:solidFill>
@@ -4437,7 +4433,7 @@
           </a:solidFill>
           <a:ln w="15875">
             <a:solidFill>
-              <a:srgbClr val="D9DEE7"/>
+              <a:srgbClr val="08A6A6"/>
             </a:solidFill>
             <a:prstDash val="solid"/>
           </a:ln>
@@ -4445,14 +4441,14 @@
       </p:sp>
       <p:sp>
         <p:nvSpPr>
-          <p:cNvPr id="12" name="Text 10"/>
-          <p:cNvSpPr txBox="1"/>
-          <p:nvPr/>
-        </p:nvSpPr>
-        <p:spPr>
-          <a:xfrm>
-            <a:off x="914400" y="3236976"/>
-            <a:ext cx="9418320" cy="877824"/>
+          <p:cNvPr id="11" name="Text 9"/>
+          <p:cNvSpPr txBox="1"/>
+          <p:nvPr/>
+        </p:nvSpPr>
+        <p:spPr>
+          <a:xfrm>
+            <a:off x="6537960" y="2011680"/>
+            <a:ext cx="4754880" cy="365760"/>
           </a:xfrm>
           <a:prstGeom prst="rect">
             <a:avLst/>
@@ -4465,23 +4461,62 @@
           <a:lstStyle/>
           <a:p>
             <a:pPr indent="0" marL="0">
-              <a:lnSpc>
-                <a:spcPct val="118000"/>
-              </a:lnSpc>
-              <a:buNone/>
-            </a:pPr>
-            <a:r>
-              <a:rPr lang="en-US" sz="1700" dirty="0">
-                <a:solidFill>
-                  <a:srgbClr val="101828"/>
+              <a:buNone/>
+            </a:pPr>
+            <a:r>
+              <a:rPr lang="en-US" sz="1600" b="1" dirty="0">
+                <a:solidFill>
+                  <a:srgbClr val="08A6A6"/>
                 </a:solidFill>
                 <a:latin typeface="IBM Plex Sans" pitchFamily="34" charset="0"/>
                 <a:ea typeface="IBM Plex Sans" pitchFamily="34" charset="-122"/>
                 <a:cs typeface="IBM Plex Sans" pitchFamily="34" charset="-120"/>
               </a:rPr>
-              <a:t>Write a program that reads a word and then a whole number, adds 1 to the number, and prints the word on one line and the new number on the next line.</a:t>
-            </a:r>
-            <a:endParaRPr lang="en-US" sz="1700" dirty="0"/>
+              <a:t>Naming rules</a:t>
+            </a:r>
+            <a:endParaRPr lang="en-US" sz="1600" dirty="0"/>
+          </a:p>
+        </p:txBody>
+      </p:sp>
+      <p:sp>
+        <p:nvSpPr>
+          <p:cNvPr id="12" name="Text 10"/>
+          <p:cNvSpPr txBox="1"/>
+          <p:nvPr/>
+        </p:nvSpPr>
+        <p:spPr>
+          <a:xfrm>
+            <a:off x="6537960" y="2395728"/>
+            <a:ext cx="4754880" cy="1005840"/>
+          </a:xfrm>
+          <a:prstGeom prst="rect">
+            <a:avLst/>
+          </a:prstGeom>
+          <a:noFill/>
+          <a:ln/>
+        </p:spPr>
+        <p:txBody>
+          <a:bodyPr wrap="square" lIns="0" tIns="0" rIns="0" bIns="0" rtlCol="0" anchor="t"/>
+          <a:lstStyle/>
+          <a:p>
+            <a:pPr indent="0" marL="0">
+              <a:lnSpc>
+                <a:spcPct val="120000"/>
+              </a:lnSpc>
+              <a:buNone/>
+            </a:pPr>
+            <a:r>
+              <a:rPr lang="en-US" sz="1300" dirty="0">
+                <a:solidFill>
+                  <a:srgbClr val="667085"/>
+                </a:solidFill>
+                <a:latin typeface="IBM Plex Sans" pitchFamily="34" charset="0"/>
+                <a:ea typeface="IBM Plex Sans" pitchFamily="34" charset="-122"/>
+                <a:cs typeface="IBM Plex Sans" pitchFamily="34" charset="-120"/>
+              </a:rPr>
+              <a:t>A Python variable name can hold letters, digits and underscores, but it cannot start with a digit or contain a space. Capitals are used for the name of a constant, so a reader can see at a glance that the value is not meant to change.</a:t>
+            </a:r>
+            <a:endParaRPr lang="en-US" sz="1300" dirty="0"/>
           </a:p>
         </p:txBody>
       </p:sp>
@@ -4493,73 +4528,12 @@
         </p:nvSpPr>
         <p:spPr>
           <a:xfrm>
-            <a:off x="10515600" y="3429000"/>
-            <a:ext cx="868680" cy="493776"/>
+            <a:off x="502920" y="3794760"/>
+            <a:ext cx="5394960" cy="1737360"/>
           </a:xfrm>
           <a:prstGeom prst="roundRect">
             <a:avLst>
-              <a:gd name="adj" fmla="val 18519"/>
-            </a:avLst>
-          </a:prstGeom>
-          <a:solidFill>
-            <a:srgbClr val="EEF2FB"/>
-          </a:solidFill>
-          <a:ln/>
-        </p:spPr>
-      </p:sp>
-      <p:sp>
-        <p:nvSpPr>
-          <p:cNvPr id="14" name="Text 12"/>
-          <p:cNvSpPr txBox="1"/>
-          <p:nvPr/>
-        </p:nvSpPr>
-        <p:spPr>
-          <a:xfrm>
-            <a:off x="10515600" y="3429000"/>
-            <a:ext cx="868680" cy="493776"/>
-          </a:xfrm>
-          <a:prstGeom prst="rect">
-            <a:avLst/>
-          </a:prstGeom>
-          <a:noFill/>
-          <a:ln/>
-        </p:spPr>
-        <p:txBody>
-          <a:bodyPr wrap="square" lIns="0" tIns="0" rIns="0" bIns="0" rtlCol="0" anchor="ctr"/>
-          <a:lstStyle/>
-          <a:p>
-            <a:pPr algn="ctr" indent="0" marL="0">
-              <a:buNone/>
-            </a:pPr>
-            <a:r>
-              <a:rPr lang="en-US" sz="1500" b="1" dirty="0">
-                <a:solidFill>
-                  <a:srgbClr val="2D63FF"/>
-                </a:solidFill>
-                <a:latin typeface="IBM Plex Mono" pitchFamily="34" charset="0"/>
-                <a:ea typeface="IBM Plex Mono" pitchFamily="34" charset="-122"/>
-                <a:cs typeface="IBM Plex Mono" pitchFamily="34" charset="-120"/>
-              </a:rPr>
-              <a:t>[4]</a:t>
-            </a:r>
-            <a:endParaRPr lang="en-US" sz="1500" dirty="0"/>
-          </a:p>
-        </p:txBody>
-      </p:sp>
-      <p:sp>
-        <p:nvSpPr>
-          <p:cNvPr id="15" name="Shape 13"/>
-          <p:cNvSpPr/>
-          <p:nvPr/>
-        </p:nvSpPr>
-        <p:spPr>
-          <a:xfrm>
-            <a:off x="502920" y="4425696"/>
-            <a:ext cx="11155680" cy="1097280"/>
-          </a:xfrm>
-          <a:prstGeom prst="roundRect">
-            <a:avLst>
-              <a:gd name="adj" fmla="val 10000"/>
+              <a:gd name="adj" fmla="val 6316"/>
             </a:avLst>
           </a:prstGeom>
           <a:solidFill>
@@ -4567,7 +4541,7 @@
           </a:solidFill>
           <a:ln w="15875">
             <a:solidFill>
-              <a:srgbClr val="D9DEE7"/>
+              <a:srgbClr val="2D63FF"/>
             </a:solidFill>
             <a:prstDash val="solid"/>
           </a:ln>
@@ -4575,14 +4549,14 @@
       </p:sp>
       <p:sp>
         <p:nvSpPr>
-          <p:cNvPr id="16" name="Text 14"/>
-          <p:cNvSpPr txBox="1"/>
-          <p:nvPr/>
-        </p:nvSpPr>
-        <p:spPr>
-          <a:xfrm>
-            <a:off x="914400" y="4535424"/>
-            <a:ext cx="9418320" cy="877824"/>
+          <p:cNvPr id="14" name="Text 12"/>
+          <p:cNvSpPr txBox="1"/>
+          <p:nvPr/>
+        </p:nvSpPr>
+        <p:spPr>
+          <a:xfrm>
+            <a:off x="822960" y="3977640"/>
+            <a:ext cx="4754880" cy="365760"/>
           </a:xfrm>
           <a:prstGeom prst="rect">
             <a:avLst/>
@@ -4595,47 +4569,130 @@
           <a:lstStyle/>
           <a:p>
             <a:pPr indent="0" marL="0">
-              <a:lnSpc>
-                <a:spcPct val="118000"/>
-              </a:lnSpc>
-              <a:buNone/>
-            </a:pPr>
-            <a:r>
-              <a:rPr lang="en-US" sz="1700" dirty="0">
-                <a:solidFill>
-                  <a:srgbClr val="101828"/>
+              <a:buNone/>
+            </a:pPr>
+            <a:r>
+              <a:rPr lang="en-US" sz="1600" b="1" dirty="0">
+                <a:solidFill>
+                  <a:srgbClr val="2D63FF"/>
                 </a:solidFill>
                 <a:latin typeface="IBM Plex Sans" pitchFamily="34" charset="0"/>
                 <a:ea typeface="IBM Plex Sans" pitchFamily="34" charset="-122"/>
                 <a:cs typeface="IBM Plex Sans" pitchFamily="34" charset="-120"/>
               </a:rPr>
-              <a:t>Write a program that reads a number which may have a decimal point, and prints one line in the form Value is 4.0, with the number shown as a real number.</a:t>
-            </a:r>
-            <a:endParaRPr lang="en-US" sz="1700" dirty="0"/>
-          </a:p>
-        </p:txBody>
-      </p:sp>
-      <p:sp>
-        <p:nvSpPr>
-          <p:cNvPr id="17" name="Shape 15"/>
+              <a:t>Why it waits</a:t>
+            </a:r>
+            <a:endParaRPr lang="en-US" sz="1600" dirty="0"/>
+          </a:p>
+        </p:txBody>
+      </p:sp>
+      <p:sp>
+        <p:nvSpPr>
+          <p:cNvPr id="15" name="Text 13"/>
+          <p:cNvSpPr txBox="1"/>
+          <p:nvPr/>
+        </p:nvSpPr>
+        <p:spPr>
+          <a:xfrm>
+            <a:off x="822960" y="4361688"/>
+            <a:ext cx="4754880" cy="1005840"/>
+          </a:xfrm>
+          <a:prstGeom prst="rect">
+            <a:avLst/>
+          </a:prstGeom>
+          <a:noFill/>
+          <a:ln/>
+        </p:spPr>
+        <p:txBody>
+          <a:bodyPr wrap="square" lIns="0" tIns="0" rIns="0" bIns="0" rtlCol="0" anchor="t"/>
+          <a:lstStyle/>
+          <a:p>
+            <a:pPr indent="0" marL="0">
+              <a:lnSpc>
+                <a:spcPct val="120000"/>
+              </a:lnSpc>
+              <a:buNone/>
+            </a:pPr>
+            <a:r>
+              <a:rPr lang="en-US" sz="1300" dirty="0">
+                <a:solidFill>
+                  <a:srgbClr val="667085"/>
+                </a:solidFill>
+                <a:latin typeface="IBM Plex Sans" pitchFamily="34" charset="0"/>
+                <a:ea typeface="IBM Plex Sans" pitchFamily="34" charset="-122"/>
+                <a:cs typeface="IBM Plex Sans" pitchFamily="34" charset="-120"/>
+              </a:rPr>
+              <a:t>input() reads one whole line, so the program only carries on once the Enter key has been pressed. Nothing else happens while it waits.</a:t>
+            </a:r>
+            <a:endParaRPr lang="en-US" sz="1300" dirty="0"/>
+          </a:p>
+        </p:txBody>
+      </p:sp>
+      <p:sp>
+        <p:nvSpPr>
+          <p:cNvPr id="16" name="Shape 14"/>
           <p:cNvSpPr/>
           <p:nvPr/>
         </p:nvSpPr>
         <p:spPr>
           <a:xfrm>
-            <a:off x="10515600" y="4727448"/>
-            <a:ext cx="868680" cy="493776"/>
+            <a:off x="6217920" y="3794760"/>
+            <a:ext cx="5394960" cy="1737360"/>
           </a:xfrm>
           <a:prstGeom prst="roundRect">
             <a:avLst>
-              <a:gd name="adj" fmla="val 18519"/>
+              <a:gd name="adj" fmla="val 6316"/>
             </a:avLst>
           </a:prstGeom>
           <a:solidFill>
-            <a:srgbClr val="EEF2FB"/>
+            <a:srgbClr val="FFFFFF"/>
           </a:solidFill>
-          <a:ln/>
-        </p:spPr>
+          <a:ln w="15875">
+            <a:solidFill>
+              <a:srgbClr val="08A6A6"/>
+            </a:solidFill>
+            <a:prstDash val="solid"/>
+          </a:ln>
+        </p:spPr>
+      </p:sp>
+      <p:sp>
+        <p:nvSpPr>
+          <p:cNvPr id="17" name="Text 15"/>
+          <p:cNvSpPr txBox="1"/>
+          <p:nvPr/>
+        </p:nvSpPr>
+        <p:spPr>
+          <a:xfrm>
+            <a:off x="6537960" y="3977640"/>
+            <a:ext cx="4754880" cy="365760"/>
+          </a:xfrm>
+          <a:prstGeom prst="rect">
+            <a:avLst/>
+          </a:prstGeom>
+          <a:noFill/>
+          <a:ln/>
+        </p:spPr>
+        <p:txBody>
+          <a:bodyPr wrap="square" lIns="0" tIns="0" rIns="0" bIns="0" rtlCol="0" anchor="ctr"/>
+          <a:lstStyle/>
+          <a:p>
+            <a:pPr indent="0" marL="0">
+              <a:buNone/>
+            </a:pPr>
+            <a:r>
+              <a:rPr lang="en-US" sz="1600" b="1" dirty="0">
+                <a:solidFill>
+                  <a:srgbClr val="08A6A6"/>
+                </a:solidFill>
+                <a:latin typeface="IBM Plex Sans" pitchFamily="34" charset="0"/>
+                <a:ea typeface="IBM Plex Sans" pitchFamily="34" charset="-122"/>
+                <a:cs typeface="IBM Plex Sans" pitchFamily="34" charset="-120"/>
+              </a:rPr>
+              <a:t>One bit each</a:t>
+            </a:r>
+            <a:endParaRPr lang="en-US" sz="1600" dirty="0"/>
+          </a:p>
+        </p:txBody>
       </p:sp>
       <p:sp>
         <p:nvSpPr>
@@ -4645,34 +4702,37 @@
         </p:nvSpPr>
         <p:spPr>
           <a:xfrm>
-            <a:off x="10515600" y="4727448"/>
-            <a:ext cx="868680" cy="493776"/>
-          </a:xfrm>
-          <a:prstGeom prst="rect">
-            <a:avLst/>
-          </a:prstGeom>
-          <a:noFill/>
-          <a:ln/>
-        </p:spPr>
-        <p:txBody>
-          <a:bodyPr wrap="square" lIns="0" tIns="0" rIns="0" bIns="0" rtlCol="0" anchor="ctr"/>
-          <a:lstStyle/>
-          <a:p>
-            <a:pPr algn="ctr" indent="0" marL="0">
-              <a:buNone/>
-            </a:pPr>
-            <a:r>
-              <a:rPr lang="en-US" sz="1500" b="1" dirty="0">
-                <a:solidFill>
-                  <a:srgbClr val="2D63FF"/>
-                </a:solidFill>
-                <a:latin typeface="IBM Plex Mono" pitchFamily="34" charset="0"/>
-                <a:ea typeface="IBM Plex Mono" pitchFamily="34" charset="-122"/>
-                <a:cs typeface="IBM Plex Mono" pitchFamily="34" charset="-120"/>
-              </a:rPr>
-              <a:t>[3]</a:t>
-            </a:r>
-            <a:endParaRPr lang="en-US" sz="1500" dirty="0"/>
+            <a:off x="6537960" y="4361688"/>
+            <a:ext cx="4754880" cy="1005840"/>
+          </a:xfrm>
+          <a:prstGeom prst="rect">
+            <a:avLst/>
+          </a:prstGeom>
+          <a:noFill/>
+          <a:ln/>
+        </p:spPr>
+        <p:txBody>
+          <a:bodyPr wrap="square" lIns="0" tIns="0" rIns="0" bIns="0" rtlCol="0" anchor="t"/>
+          <a:lstStyle/>
+          <a:p>
+            <a:pPr indent="0" marL="0">
+              <a:lnSpc>
+                <a:spcPct val="120000"/>
+              </a:lnSpc>
+              <a:buNone/>
+            </a:pPr>
+            <a:r>
+              <a:rPr lang="en-US" sz="1300" dirty="0">
+                <a:solidFill>
+                  <a:srgbClr val="667085"/>
+                </a:solidFill>
+                <a:latin typeface="IBM Plex Sans" pitchFamily="34" charset="0"/>
+                <a:ea typeface="IBM Plex Sans" pitchFamily="34" charset="-122"/>
+                <a:cs typeface="IBM Plex Sans" pitchFamily="34" charset="-120"/>
+              </a:rPr>
+              <a:t>A boolean has only two possible values, so it needs just one bit of storage - the smallest piece of data there is.</a:t>
+            </a:r>
+            <a:endParaRPr lang="en-US" sz="1300" dirty="0"/>
           </a:p>
         </p:txBody>
       </p:sp>
@@ -4687,6 +4747,893 @@
 <file path=ppt/slides/slide14.xml><?xml version="1.0" encoding="utf-8"?>
 <p:sld xmlns:a="http://schemas.openxmlformats.org/drawingml/2006/main" xmlns:r="http://schemas.openxmlformats.org/officeDocument/2006/relationships" xmlns:p="http://schemas.openxmlformats.org/presentationml/2006/main">
   <p:cSld name="Slide 14">
+    <p:bg>
+      <p:bgPr>
+        <a:solidFill>
+          <a:srgbClr val="F7F7F4"/>
+        </a:solidFill>
+      </p:bgPr>
+    </p:bg>
+    <p:spTree>
+      <p:nvGrpSpPr>
+        <p:cNvPr id="1" name=""/>
+        <p:cNvGrpSpPr/>
+        <p:nvPr/>
+      </p:nvGrpSpPr>
+      <p:grpSpPr>
+        <a:xfrm>
+          <a:off x="0" y="0"/>
+          <a:ext cx="0" cy="0"/>
+          <a:chOff x="0" y="0"/>
+          <a:chExt cx="0" cy="0"/>
+        </a:xfrm>
+      </p:grpSpPr>
+      <p:sp>
+        <p:nvSpPr>
+          <p:cNvPr id="2" name="Shape 0"/>
+          <p:cNvSpPr/>
+          <p:nvPr/>
+        </p:nvSpPr>
+        <p:spPr>
+          <a:xfrm>
+            <a:off x="0" y="0"/>
+            <a:ext cx="12188952" cy="82296"/>
+          </a:xfrm>
+          <a:prstGeom prst="rect">
+            <a:avLst/>
+          </a:prstGeom>
+          <a:solidFill>
+            <a:srgbClr val="2D63FF"/>
+          </a:solidFill>
+          <a:ln/>
+        </p:spPr>
+      </p:sp>
+      <p:sp>
+        <p:nvSpPr>
+          <p:cNvPr id="3" name="Text 1"/>
+          <p:cNvSpPr txBox="1"/>
+          <p:nvPr/>
+        </p:nvSpPr>
+        <p:spPr>
+          <a:xfrm>
+            <a:off x="502920" y="6236208"/>
+            <a:ext cx="7772400" cy="365760"/>
+          </a:xfrm>
+          <a:prstGeom prst="rect">
+            <a:avLst/>
+          </a:prstGeom>
+          <a:noFill/>
+          <a:ln/>
+        </p:spPr>
+        <p:txBody>
+          <a:bodyPr wrap="square" lIns="0" tIns="0" rIns="0" bIns="0" rtlCol="0" anchor="ctr"/>
+          <a:lstStyle/>
+          <a:p>
+            <a:pPr indent="0" marL="0">
+              <a:buNone/>
+            </a:pPr>
+            <a:r>
+              <a:rPr lang="en-US" sz="1100" dirty="0">
+                <a:solidFill>
+                  <a:srgbClr val="667085"/>
+                </a:solidFill>
+                <a:latin typeface="IBM Plex Mono" pitchFamily="34" charset="0"/>
+                <a:ea typeface="IBM Plex Mono" pitchFamily="34" charset="-122"/>
+                <a:cs typeface="IBM Plex Mono" pitchFamily="34" charset="-120"/>
+              </a:rPr>
+              <a:t>Python programming  |  Lesson 1</a:t>
+            </a:r>
+            <a:endParaRPr lang="en-US" sz="1100" dirty="0"/>
+          </a:p>
+        </p:txBody>
+      </p:sp>
+      <p:sp>
+        <p:nvSpPr>
+          <p:cNvPr id="4" name="Text 2"/>
+          <p:cNvSpPr txBox="1"/>
+          <p:nvPr/>
+        </p:nvSpPr>
+        <p:spPr>
+          <a:xfrm>
+            <a:off x="9326880" y="6236208"/>
+            <a:ext cx="2377440" cy="365760"/>
+          </a:xfrm>
+          <a:prstGeom prst="rect">
+            <a:avLst/>
+          </a:prstGeom>
+          <a:noFill/>
+          <a:ln/>
+        </p:spPr>
+        <p:txBody>
+          <a:bodyPr wrap="square" lIns="0" tIns="0" rIns="0" bIns="0" rtlCol="0" anchor="ctr"/>
+          <a:lstStyle/>
+          <a:p>
+            <a:pPr algn="r" indent="0" marL="0">
+              <a:buNone/>
+            </a:pPr>
+            <a:r>
+              <a:rPr lang="en-US" sz="1100" dirty="0">
+                <a:solidFill>
+                  <a:srgbClr val="667085"/>
+                </a:solidFill>
+                <a:latin typeface="IBM Plex Mono" pitchFamily="34" charset="0"/>
+                <a:ea typeface="IBM Plex Mono" pitchFamily="34" charset="-122"/>
+                <a:cs typeface="IBM Plex Mono" pitchFamily="34" charset="-120"/>
+              </a:rPr>
+              <a:t>Revise 360</a:t>
+            </a:r>
+            <a:endParaRPr lang="en-US" sz="1100" dirty="0"/>
+          </a:p>
+        </p:txBody>
+      </p:sp>
+      <p:sp>
+        <p:nvSpPr>
+          <p:cNvPr id="5" name="Text 3"/>
+          <p:cNvSpPr txBox="1"/>
+          <p:nvPr/>
+        </p:nvSpPr>
+        <p:spPr>
+          <a:xfrm>
+            <a:off x="502920" y="411480"/>
+            <a:ext cx="11155680" cy="777240"/>
+          </a:xfrm>
+          <a:prstGeom prst="rect">
+            <a:avLst/>
+          </a:prstGeom>
+          <a:noFill/>
+          <a:ln/>
+        </p:spPr>
+        <p:txBody>
+          <a:bodyPr wrap="square" lIns="0" tIns="0" rIns="0" bIns="0" rtlCol="0" anchor="ctr"/>
+          <a:lstStyle/>
+          <a:p>
+            <a:pPr indent="0" marL="0">
+              <a:buNone/>
+            </a:pPr>
+            <a:r>
+              <a:rPr lang="en-US" sz="3200" b="1" dirty="0">
+                <a:solidFill>
+                  <a:srgbClr val="101828"/>
+                </a:solidFill>
+                <a:latin typeface="IBM Plex Sans" pitchFamily="34" charset="0"/>
+                <a:ea typeface="IBM Plex Sans" pitchFamily="34" charset="-122"/>
+                <a:cs typeface="IBM Plex Sans" pitchFamily="34" charset="-120"/>
+              </a:rPr>
+              <a:t>Exam practice</a:t>
+            </a:r>
+            <a:endParaRPr lang="en-US" sz="3200" dirty="0"/>
+          </a:p>
+        </p:txBody>
+      </p:sp>
+      <p:sp>
+        <p:nvSpPr>
+          <p:cNvPr id="6" name="Text 4"/>
+          <p:cNvSpPr txBox="1"/>
+          <p:nvPr/>
+        </p:nvSpPr>
+        <p:spPr>
+          <a:xfrm>
+            <a:off x="502920" y="1170432"/>
+            <a:ext cx="11155680" cy="411480"/>
+          </a:xfrm>
+          <a:prstGeom prst="rect">
+            <a:avLst/>
+          </a:prstGeom>
+          <a:noFill/>
+          <a:ln/>
+        </p:spPr>
+        <p:txBody>
+          <a:bodyPr wrap="square" lIns="0" tIns="0" rIns="0" bIns="0" rtlCol="0" anchor="ctr"/>
+          <a:lstStyle/>
+          <a:p>
+            <a:pPr indent="0" marL="0">
+              <a:buNone/>
+            </a:pPr>
+            <a:r>
+              <a:rPr lang="en-US" sz="1500" dirty="0">
+                <a:solidFill>
+                  <a:srgbClr val="667085"/>
+                </a:solidFill>
+                <a:latin typeface="IBM Plex Sans" pitchFamily="34" charset="0"/>
+                <a:ea typeface="IBM Plex Sans" pitchFamily="34" charset="-122"/>
+                <a:cs typeface="IBM Plex Sans" pitchFamily="34" charset="-120"/>
+              </a:rPr>
+              <a:t>Devices away. Answer from memory on the worksheet.</a:t>
+            </a:r>
+            <a:endParaRPr lang="en-US" sz="1500" dirty="0"/>
+          </a:p>
+        </p:txBody>
+      </p:sp>
+      <p:sp>
+        <p:nvSpPr>
+          <p:cNvPr id="7" name="Shape 5"/>
+          <p:cNvSpPr/>
+          <p:nvPr/>
+        </p:nvSpPr>
+        <p:spPr>
+          <a:xfrm>
+            <a:off x="502920" y="1828800"/>
+            <a:ext cx="11155680" cy="1097280"/>
+          </a:xfrm>
+          <a:prstGeom prst="roundRect">
+            <a:avLst>
+              <a:gd name="adj" fmla="val 10000"/>
+            </a:avLst>
+          </a:prstGeom>
+          <a:solidFill>
+            <a:srgbClr val="FFFFFF"/>
+          </a:solidFill>
+          <a:ln w="15875">
+            <a:solidFill>
+              <a:srgbClr val="D9DEE7"/>
+            </a:solidFill>
+            <a:prstDash val="solid"/>
+          </a:ln>
+        </p:spPr>
+      </p:sp>
+      <p:sp>
+        <p:nvSpPr>
+          <p:cNvPr id="8" name="Text 6"/>
+          <p:cNvSpPr txBox="1"/>
+          <p:nvPr/>
+        </p:nvSpPr>
+        <p:spPr>
+          <a:xfrm>
+            <a:off x="914400" y="1938528"/>
+            <a:ext cx="9418320" cy="877824"/>
+          </a:xfrm>
+          <a:prstGeom prst="rect">
+            <a:avLst/>
+          </a:prstGeom>
+          <a:noFill/>
+          <a:ln/>
+        </p:spPr>
+        <p:txBody>
+          <a:bodyPr wrap="square" lIns="0" tIns="0" rIns="0" bIns="0" rtlCol="0" anchor="ctr"/>
+          <a:lstStyle/>
+          <a:p>
+            <a:pPr indent="0" marL="0">
+              <a:lnSpc>
+                <a:spcPct val="118000"/>
+              </a:lnSpc>
+              <a:buNone/>
+            </a:pPr>
+            <a:r>
+              <a:rPr lang="en-US" sz="1700" dirty="0">
+                <a:solidFill>
+                  <a:srgbClr val="101828"/>
+                </a:solidFill>
+                <a:latin typeface="IBM Plex Sans" pitchFamily="34" charset="0"/>
+                <a:ea typeface="IBM Plex Sans" pitchFamily="34" charset="-122"/>
+                <a:cs typeface="IBM Plex Sans" pitchFamily="34" charset="-120"/>
+              </a:rPr>
+              <a:t>A pupil writes two lines to add 1 to a number that has been typed in: </a:t>
+            </a:r>
+            <a:pPr indent="0" marL="0">
+              <a:lnSpc>
+                <a:spcPct val="118000"/>
+              </a:lnSpc>
+              <a:buNone/>
+            </a:pPr>
+            <a:r>
+              <a:rPr lang="en-US" sz="1700" dirty="0">
+                <a:solidFill>
+                  <a:srgbClr val="18181B"/>
+                </a:solidFill>
+                <a:latin typeface="IBM Plex Mono" pitchFamily="34" charset="0"/>
+                <a:ea typeface="IBM Plex Mono" pitchFamily="34" charset="-122"/>
+                <a:cs typeface="IBM Plex Mono" pitchFamily="34" charset="-120"/>
+              </a:rPr>
+              <a:t>n</a:t>
+            </a:r>
+            <a:pPr indent="0" marL="0">
+              <a:lnSpc>
+                <a:spcPct val="118000"/>
+              </a:lnSpc>
+              <a:buNone/>
+            </a:pPr>
+            <a:r>
+              <a:rPr lang="en-US" sz="1700" dirty="0">
+                <a:solidFill>
+                  <a:srgbClr val="18181B"/>
+                </a:solidFill>
+                <a:latin typeface="IBM Plex Mono" pitchFamily="34" charset="0"/>
+                <a:ea typeface="IBM Plex Mono" pitchFamily="34" charset="-122"/>
+                <a:cs typeface="IBM Plex Mono" pitchFamily="34" charset="-120"/>
+              </a:rPr>
+              <a:t> </a:t>
+            </a:r>
+            <a:pPr indent="0" marL="0">
+              <a:lnSpc>
+                <a:spcPct val="118000"/>
+              </a:lnSpc>
+              <a:buNone/>
+            </a:pPr>
+            <a:r>
+              <a:rPr lang="en-US" sz="1700" dirty="0">
+                <a:solidFill>
+                  <a:srgbClr val="3F3F46"/>
+                </a:solidFill>
+                <a:latin typeface="IBM Plex Mono" pitchFamily="34" charset="0"/>
+                <a:ea typeface="IBM Plex Mono" pitchFamily="34" charset="-122"/>
+                <a:cs typeface="IBM Plex Mono" pitchFamily="34" charset="-120"/>
+              </a:rPr>
+              <a:t>=</a:t>
+            </a:r>
+            <a:pPr indent="0" marL="0">
+              <a:lnSpc>
+                <a:spcPct val="118000"/>
+              </a:lnSpc>
+              <a:buNone/>
+            </a:pPr>
+            <a:r>
+              <a:rPr lang="en-US" sz="1700" dirty="0">
+                <a:solidFill>
+                  <a:srgbClr val="18181B"/>
+                </a:solidFill>
+                <a:latin typeface="IBM Plex Mono" pitchFamily="34" charset="0"/>
+                <a:ea typeface="IBM Plex Mono" pitchFamily="34" charset="-122"/>
+                <a:cs typeface="IBM Plex Mono" pitchFamily="34" charset="-120"/>
+              </a:rPr>
+              <a:t> </a:t>
+            </a:r>
+            <a:pPr indent="0" marL="0">
+              <a:lnSpc>
+                <a:spcPct val="118000"/>
+              </a:lnSpc>
+              <a:buNone/>
+            </a:pPr>
+            <a:r>
+              <a:rPr lang="en-US" sz="1700" dirty="0">
+                <a:solidFill>
+                  <a:srgbClr val="1D4ED8"/>
+                </a:solidFill>
+                <a:latin typeface="IBM Plex Mono" pitchFamily="34" charset="0"/>
+                <a:ea typeface="IBM Plex Mono" pitchFamily="34" charset="-122"/>
+                <a:cs typeface="IBM Plex Mono" pitchFamily="34" charset="-120"/>
+              </a:rPr>
+              <a:t>input</a:t>
+            </a:r>
+            <a:pPr indent="0" marL="0">
+              <a:lnSpc>
+                <a:spcPct val="118000"/>
+              </a:lnSpc>
+              <a:buNone/>
+            </a:pPr>
+            <a:r>
+              <a:rPr lang="en-US" sz="1700" dirty="0">
+                <a:solidFill>
+                  <a:srgbClr val="3F3F46"/>
+                </a:solidFill>
+                <a:latin typeface="IBM Plex Mono" pitchFamily="34" charset="0"/>
+                <a:ea typeface="IBM Plex Mono" pitchFamily="34" charset="-122"/>
+                <a:cs typeface="IBM Plex Mono" pitchFamily="34" charset="-120"/>
+              </a:rPr>
+              <a:t>(</a:t>
+            </a:r>
+            <a:pPr indent="0" marL="0">
+              <a:lnSpc>
+                <a:spcPct val="118000"/>
+              </a:lnSpc>
+              <a:buNone/>
+            </a:pPr>
+            <a:r>
+              <a:rPr lang="en-US" sz="1700" dirty="0">
+                <a:solidFill>
+                  <a:srgbClr val="3F3F46"/>
+                </a:solidFill>
+                <a:latin typeface="IBM Plex Mono" pitchFamily="34" charset="0"/>
+                <a:ea typeface="IBM Plex Mono" pitchFamily="34" charset="-122"/>
+                <a:cs typeface="IBM Plex Mono" pitchFamily="34" charset="-120"/>
+              </a:rPr>
+              <a:t>)</a:t>
+            </a:r>
+            <a:pPr indent="0" marL="0">
+              <a:lnSpc>
+                <a:spcPct val="118000"/>
+              </a:lnSpc>
+              <a:buNone/>
+            </a:pPr>
+            <a:r>
+              <a:rPr lang="en-US" sz="1700" dirty="0">
+                <a:solidFill>
+                  <a:srgbClr val="101828"/>
+                </a:solidFill>
+                <a:latin typeface="IBM Plex Sans" pitchFamily="34" charset="0"/>
+                <a:ea typeface="IBM Plex Sans" pitchFamily="34" charset="-122"/>
+                <a:cs typeface="IBM Plex Sans" pitchFamily="34" charset="-120"/>
+              </a:rPr>
+              <a:t> and then </a:t>
+            </a:r>
+            <a:pPr indent="0" marL="0">
+              <a:lnSpc>
+                <a:spcPct val="118000"/>
+              </a:lnSpc>
+              <a:buNone/>
+            </a:pPr>
+            <a:r>
+              <a:rPr lang="en-US" sz="1700" dirty="0">
+                <a:solidFill>
+                  <a:srgbClr val="1D4ED8"/>
+                </a:solidFill>
+                <a:latin typeface="IBM Plex Mono" pitchFamily="34" charset="0"/>
+                <a:ea typeface="IBM Plex Mono" pitchFamily="34" charset="-122"/>
+                <a:cs typeface="IBM Plex Mono" pitchFamily="34" charset="-120"/>
+              </a:rPr>
+              <a:t>print</a:t>
+            </a:r>
+            <a:pPr indent="0" marL="0">
+              <a:lnSpc>
+                <a:spcPct val="118000"/>
+              </a:lnSpc>
+              <a:buNone/>
+            </a:pPr>
+            <a:r>
+              <a:rPr lang="en-US" sz="1700" dirty="0">
+                <a:solidFill>
+                  <a:srgbClr val="3F3F46"/>
+                </a:solidFill>
+                <a:latin typeface="IBM Plex Mono" pitchFamily="34" charset="0"/>
+                <a:ea typeface="IBM Plex Mono" pitchFamily="34" charset="-122"/>
+                <a:cs typeface="IBM Plex Mono" pitchFamily="34" charset="-120"/>
+              </a:rPr>
+              <a:t>(</a:t>
+            </a:r>
+            <a:pPr indent="0" marL="0">
+              <a:lnSpc>
+                <a:spcPct val="118000"/>
+              </a:lnSpc>
+              <a:buNone/>
+            </a:pPr>
+            <a:r>
+              <a:rPr lang="en-US" sz="1700" dirty="0">
+                <a:solidFill>
+                  <a:srgbClr val="18181B"/>
+                </a:solidFill>
+                <a:latin typeface="IBM Plex Mono" pitchFamily="34" charset="0"/>
+                <a:ea typeface="IBM Plex Mono" pitchFamily="34" charset="-122"/>
+                <a:cs typeface="IBM Plex Mono" pitchFamily="34" charset="-120"/>
+              </a:rPr>
+              <a:t>n</a:t>
+            </a:r>
+            <a:pPr indent="0" marL="0">
+              <a:lnSpc>
+                <a:spcPct val="118000"/>
+              </a:lnSpc>
+              <a:buNone/>
+            </a:pPr>
+            <a:r>
+              <a:rPr lang="en-US" sz="1700" dirty="0">
+                <a:solidFill>
+                  <a:srgbClr val="18181B"/>
+                </a:solidFill>
+                <a:latin typeface="IBM Plex Mono" pitchFamily="34" charset="0"/>
+                <a:ea typeface="IBM Plex Mono" pitchFamily="34" charset="-122"/>
+                <a:cs typeface="IBM Plex Mono" pitchFamily="34" charset="-120"/>
+              </a:rPr>
+              <a:t> </a:t>
+            </a:r>
+            <a:pPr indent="0" marL="0">
+              <a:lnSpc>
+                <a:spcPct val="118000"/>
+              </a:lnSpc>
+              <a:buNone/>
+            </a:pPr>
+            <a:r>
+              <a:rPr lang="en-US" sz="1700" dirty="0">
+                <a:solidFill>
+                  <a:srgbClr val="3F3F46"/>
+                </a:solidFill>
+                <a:latin typeface="IBM Plex Mono" pitchFamily="34" charset="0"/>
+                <a:ea typeface="IBM Plex Mono" pitchFamily="34" charset="-122"/>
+                <a:cs typeface="IBM Plex Mono" pitchFamily="34" charset="-120"/>
+              </a:rPr>
+              <a:t>+</a:t>
+            </a:r>
+            <a:pPr indent="0" marL="0">
+              <a:lnSpc>
+                <a:spcPct val="118000"/>
+              </a:lnSpc>
+              <a:buNone/>
+            </a:pPr>
+            <a:r>
+              <a:rPr lang="en-US" sz="1700" dirty="0">
+                <a:solidFill>
+                  <a:srgbClr val="18181B"/>
+                </a:solidFill>
+                <a:latin typeface="IBM Plex Mono" pitchFamily="34" charset="0"/>
+                <a:ea typeface="IBM Plex Mono" pitchFamily="34" charset="-122"/>
+                <a:cs typeface="IBM Plex Mono" pitchFamily="34" charset="-120"/>
+              </a:rPr>
+              <a:t> </a:t>
+            </a:r>
+            <a:pPr indent="0" marL="0">
+              <a:lnSpc>
+                <a:spcPct val="118000"/>
+              </a:lnSpc>
+              <a:buNone/>
+            </a:pPr>
+            <a:r>
+              <a:rPr lang="en-US" sz="1700" dirty="0">
+                <a:solidFill>
+                  <a:srgbClr val="9A3412"/>
+                </a:solidFill>
+                <a:latin typeface="IBM Plex Mono" pitchFamily="34" charset="0"/>
+                <a:ea typeface="IBM Plex Mono" pitchFamily="34" charset="-122"/>
+                <a:cs typeface="IBM Plex Mono" pitchFamily="34" charset="-120"/>
+              </a:rPr>
+              <a:t>1</a:t>
+            </a:r>
+            <a:pPr indent="0" marL="0">
+              <a:lnSpc>
+                <a:spcPct val="118000"/>
+              </a:lnSpc>
+              <a:buNone/>
+            </a:pPr>
+            <a:r>
+              <a:rPr lang="en-US" sz="1700" dirty="0">
+                <a:solidFill>
+                  <a:srgbClr val="3F3F46"/>
+                </a:solidFill>
+                <a:latin typeface="IBM Plex Mono" pitchFamily="34" charset="0"/>
+                <a:ea typeface="IBM Plex Mono" pitchFamily="34" charset="-122"/>
+                <a:cs typeface="IBM Plex Mono" pitchFamily="34" charset="-120"/>
+              </a:rPr>
+              <a:t>)</a:t>
+            </a:r>
+            <a:pPr indent="0" marL="0">
+              <a:lnSpc>
+                <a:spcPct val="118000"/>
+              </a:lnSpc>
+              <a:buNone/>
+            </a:pPr>
+            <a:r>
+              <a:rPr lang="en-US" sz="1700" dirty="0">
+                <a:solidFill>
+                  <a:srgbClr val="101828"/>
+                </a:solidFill>
+                <a:latin typeface="IBM Plex Sans" pitchFamily="34" charset="0"/>
+                <a:ea typeface="IBM Plex Sans" pitchFamily="34" charset="-122"/>
+                <a:cs typeface="IBM Plex Sans" pitchFamily="34" charset="-120"/>
+              </a:rPr>
+              <a:t>. State what Python does when these two lines run, and rewrite them so that they work.</a:t>
+            </a:r>
+            <a:endParaRPr lang="en-US" sz="1700" dirty="0"/>
+          </a:p>
+        </p:txBody>
+      </p:sp>
+      <p:sp>
+        <p:nvSpPr>
+          <p:cNvPr id="9" name="Shape 7"/>
+          <p:cNvSpPr/>
+          <p:nvPr/>
+        </p:nvSpPr>
+        <p:spPr>
+          <a:xfrm>
+            <a:off x="10515600" y="2130552"/>
+            <a:ext cx="868680" cy="493776"/>
+          </a:xfrm>
+          <a:prstGeom prst="roundRect">
+            <a:avLst>
+              <a:gd name="adj" fmla="val 18519"/>
+            </a:avLst>
+          </a:prstGeom>
+          <a:solidFill>
+            <a:srgbClr val="EEF2FB"/>
+          </a:solidFill>
+          <a:ln/>
+        </p:spPr>
+      </p:sp>
+      <p:sp>
+        <p:nvSpPr>
+          <p:cNvPr id="10" name="Text 8"/>
+          <p:cNvSpPr txBox="1"/>
+          <p:nvPr/>
+        </p:nvSpPr>
+        <p:spPr>
+          <a:xfrm>
+            <a:off x="10515600" y="2130552"/>
+            <a:ext cx="868680" cy="493776"/>
+          </a:xfrm>
+          <a:prstGeom prst="rect">
+            <a:avLst/>
+          </a:prstGeom>
+          <a:noFill/>
+          <a:ln/>
+        </p:spPr>
+        <p:txBody>
+          <a:bodyPr wrap="square" lIns="0" tIns="0" rIns="0" bIns="0" rtlCol="0" anchor="ctr"/>
+          <a:lstStyle/>
+          <a:p>
+            <a:pPr algn="ctr" indent="0" marL="0">
+              <a:buNone/>
+            </a:pPr>
+            <a:r>
+              <a:rPr lang="en-US" sz="1500" b="1" dirty="0">
+                <a:solidFill>
+                  <a:srgbClr val="2D63FF"/>
+                </a:solidFill>
+                <a:latin typeface="IBM Plex Mono" pitchFamily="34" charset="0"/>
+                <a:ea typeface="IBM Plex Mono" pitchFamily="34" charset="-122"/>
+                <a:cs typeface="IBM Plex Mono" pitchFamily="34" charset="-120"/>
+              </a:rPr>
+              <a:t>[3]</a:t>
+            </a:r>
+            <a:endParaRPr lang="en-US" sz="1500" dirty="0"/>
+          </a:p>
+        </p:txBody>
+      </p:sp>
+      <p:sp>
+        <p:nvSpPr>
+          <p:cNvPr id="11" name="Shape 9"/>
+          <p:cNvSpPr/>
+          <p:nvPr/>
+        </p:nvSpPr>
+        <p:spPr>
+          <a:xfrm>
+            <a:off x="502920" y="3127248"/>
+            <a:ext cx="11155680" cy="1097280"/>
+          </a:xfrm>
+          <a:prstGeom prst="roundRect">
+            <a:avLst>
+              <a:gd name="adj" fmla="val 10000"/>
+            </a:avLst>
+          </a:prstGeom>
+          <a:solidFill>
+            <a:srgbClr val="FFFFFF"/>
+          </a:solidFill>
+          <a:ln w="15875">
+            <a:solidFill>
+              <a:srgbClr val="D9DEE7"/>
+            </a:solidFill>
+            <a:prstDash val="solid"/>
+          </a:ln>
+        </p:spPr>
+      </p:sp>
+      <p:sp>
+        <p:nvSpPr>
+          <p:cNvPr id="12" name="Text 10"/>
+          <p:cNvSpPr txBox="1"/>
+          <p:nvPr/>
+        </p:nvSpPr>
+        <p:spPr>
+          <a:xfrm>
+            <a:off x="914400" y="3236976"/>
+            <a:ext cx="9418320" cy="877824"/>
+          </a:xfrm>
+          <a:prstGeom prst="rect">
+            <a:avLst/>
+          </a:prstGeom>
+          <a:noFill/>
+          <a:ln/>
+        </p:spPr>
+        <p:txBody>
+          <a:bodyPr wrap="square" lIns="0" tIns="0" rIns="0" bIns="0" rtlCol="0" anchor="ctr"/>
+          <a:lstStyle/>
+          <a:p>
+            <a:pPr indent="0" marL="0">
+              <a:lnSpc>
+                <a:spcPct val="118000"/>
+              </a:lnSpc>
+              <a:buNone/>
+            </a:pPr>
+            <a:r>
+              <a:rPr lang="en-US" sz="1700" dirty="0">
+                <a:solidFill>
+                  <a:srgbClr val="101828"/>
+                </a:solidFill>
+                <a:latin typeface="IBM Plex Sans" pitchFamily="34" charset="0"/>
+                <a:ea typeface="IBM Plex Sans" pitchFamily="34" charset="-122"/>
+                <a:cs typeface="IBM Plex Sans" pitchFamily="34" charset="-120"/>
+              </a:rPr>
+              <a:t>Write a program that reads a word and then a whole number, adds 1 to the number, and prints the word on one line and the new number on the next line.</a:t>
+            </a:r>
+            <a:endParaRPr lang="en-US" sz="1700" dirty="0"/>
+          </a:p>
+        </p:txBody>
+      </p:sp>
+      <p:sp>
+        <p:nvSpPr>
+          <p:cNvPr id="13" name="Shape 11"/>
+          <p:cNvSpPr/>
+          <p:nvPr/>
+        </p:nvSpPr>
+        <p:spPr>
+          <a:xfrm>
+            <a:off x="10515600" y="3429000"/>
+            <a:ext cx="868680" cy="493776"/>
+          </a:xfrm>
+          <a:prstGeom prst="roundRect">
+            <a:avLst>
+              <a:gd name="adj" fmla="val 18519"/>
+            </a:avLst>
+          </a:prstGeom>
+          <a:solidFill>
+            <a:srgbClr val="EEF2FB"/>
+          </a:solidFill>
+          <a:ln/>
+        </p:spPr>
+      </p:sp>
+      <p:sp>
+        <p:nvSpPr>
+          <p:cNvPr id="14" name="Text 12"/>
+          <p:cNvSpPr txBox="1"/>
+          <p:nvPr/>
+        </p:nvSpPr>
+        <p:spPr>
+          <a:xfrm>
+            <a:off x="10515600" y="3429000"/>
+            <a:ext cx="868680" cy="493776"/>
+          </a:xfrm>
+          <a:prstGeom prst="rect">
+            <a:avLst/>
+          </a:prstGeom>
+          <a:noFill/>
+          <a:ln/>
+        </p:spPr>
+        <p:txBody>
+          <a:bodyPr wrap="square" lIns="0" tIns="0" rIns="0" bIns="0" rtlCol="0" anchor="ctr"/>
+          <a:lstStyle/>
+          <a:p>
+            <a:pPr algn="ctr" indent="0" marL="0">
+              <a:buNone/>
+            </a:pPr>
+            <a:r>
+              <a:rPr lang="en-US" sz="1500" b="1" dirty="0">
+                <a:solidFill>
+                  <a:srgbClr val="2D63FF"/>
+                </a:solidFill>
+                <a:latin typeface="IBM Plex Mono" pitchFamily="34" charset="0"/>
+                <a:ea typeface="IBM Plex Mono" pitchFamily="34" charset="-122"/>
+                <a:cs typeface="IBM Plex Mono" pitchFamily="34" charset="-120"/>
+              </a:rPr>
+              <a:t>[4]</a:t>
+            </a:r>
+            <a:endParaRPr lang="en-US" sz="1500" dirty="0"/>
+          </a:p>
+        </p:txBody>
+      </p:sp>
+      <p:sp>
+        <p:nvSpPr>
+          <p:cNvPr id="15" name="Shape 13"/>
+          <p:cNvSpPr/>
+          <p:nvPr/>
+        </p:nvSpPr>
+        <p:spPr>
+          <a:xfrm>
+            <a:off x="502920" y="4425696"/>
+            <a:ext cx="11155680" cy="1097280"/>
+          </a:xfrm>
+          <a:prstGeom prst="roundRect">
+            <a:avLst>
+              <a:gd name="adj" fmla="val 10000"/>
+            </a:avLst>
+          </a:prstGeom>
+          <a:solidFill>
+            <a:srgbClr val="FFFFFF"/>
+          </a:solidFill>
+          <a:ln w="15875">
+            <a:solidFill>
+              <a:srgbClr val="D9DEE7"/>
+            </a:solidFill>
+            <a:prstDash val="solid"/>
+          </a:ln>
+        </p:spPr>
+      </p:sp>
+      <p:sp>
+        <p:nvSpPr>
+          <p:cNvPr id="16" name="Text 14"/>
+          <p:cNvSpPr txBox="1"/>
+          <p:nvPr/>
+        </p:nvSpPr>
+        <p:spPr>
+          <a:xfrm>
+            <a:off x="914400" y="4535424"/>
+            <a:ext cx="9418320" cy="877824"/>
+          </a:xfrm>
+          <a:prstGeom prst="rect">
+            <a:avLst/>
+          </a:prstGeom>
+          <a:noFill/>
+          <a:ln/>
+        </p:spPr>
+        <p:txBody>
+          <a:bodyPr wrap="square" lIns="0" tIns="0" rIns="0" bIns="0" rtlCol="0" anchor="ctr"/>
+          <a:lstStyle/>
+          <a:p>
+            <a:pPr indent="0" marL="0">
+              <a:lnSpc>
+                <a:spcPct val="118000"/>
+              </a:lnSpc>
+              <a:buNone/>
+            </a:pPr>
+            <a:r>
+              <a:rPr lang="en-US" sz="1700" dirty="0">
+                <a:solidFill>
+                  <a:srgbClr val="101828"/>
+                </a:solidFill>
+                <a:latin typeface="IBM Plex Sans" pitchFamily="34" charset="0"/>
+                <a:ea typeface="IBM Plex Sans" pitchFamily="34" charset="-122"/>
+                <a:cs typeface="IBM Plex Sans" pitchFamily="34" charset="-120"/>
+              </a:rPr>
+              <a:t>Write a program that reads a number which may have a decimal point, and prints one line in the form Value is 4.0, with the number shown as a real number.</a:t>
+            </a:r>
+            <a:endParaRPr lang="en-US" sz="1700" dirty="0"/>
+          </a:p>
+        </p:txBody>
+      </p:sp>
+      <p:sp>
+        <p:nvSpPr>
+          <p:cNvPr id="17" name="Shape 15"/>
+          <p:cNvSpPr/>
+          <p:nvPr/>
+        </p:nvSpPr>
+        <p:spPr>
+          <a:xfrm>
+            <a:off x="10515600" y="4727448"/>
+            <a:ext cx="868680" cy="493776"/>
+          </a:xfrm>
+          <a:prstGeom prst="roundRect">
+            <a:avLst>
+              <a:gd name="adj" fmla="val 18519"/>
+            </a:avLst>
+          </a:prstGeom>
+          <a:solidFill>
+            <a:srgbClr val="EEF2FB"/>
+          </a:solidFill>
+          <a:ln/>
+        </p:spPr>
+      </p:sp>
+      <p:sp>
+        <p:nvSpPr>
+          <p:cNvPr id="18" name="Text 16"/>
+          <p:cNvSpPr txBox="1"/>
+          <p:nvPr/>
+        </p:nvSpPr>
+        <p:spPr>
+          <a:xfrm>
+            <a:off x="10515600" y="4727448"/>
+            <a:ext cx="868680" cy="493776"/>
+          </a:xfrm>
+          <a:prstGeom prst="rect">
+            <a:avLst/>
+          </a:prstGeom>
+          <a:noFill/>
+          <a:ln/>
+        </p:spPr>
+        <p:txBody>
+          <a:bodyPr wrap="square" lIns="0" tIns="0" rIns="0" bIns="0" rtlCol="0" anchor="ctr"/>
+          <a:lstStyle/>
+          <a:p>
+            <a:pPr algn="ctr" indent="0" marL="0">
+              <a:buNone/>
+            </a:pPr>
+            <a:r>
+              <a:rPr lang="en-US" sz="1500" b="1" dirty="0">
+                <a:solidFill>
+                  <a:srgbClr val="2D63FF"/>
+                </a:solidFill>
+                <a:latin typeface="IBM Plex Mono" pitchFamily="34" charset="0"/>
+                <a:ea typeface="IBM Plex Mono" pitchFamily="34" charset="-122"/>
+                <a:cs typeface="IBM Plex Mono" pitchFamily="34" charset="-120"/>
+              </a:rPr>
+              <a:t>[3]</a:t>
+            </a:r>
+            <a:endParaRPr lang="en-US" sz="1500" dirty="0"/>
+          </a:p>
+        </p:txBody>
+      </p:sp>
+    </p:spTree>
+  </p:cSld>
+  <p:clrMapOvr>
+    <a:masterClrMapping/>
+  </p:clrMapOvr>
+</p:sld>
+</file>
+
+<file path=ppt/slides/slide15.xml><?xml version="1.0" encoding="utf-8"?>
+<p:sld xmlns:a="http://schemas.openxmlformats.org/drawingml/2006/main" xmlns:r="http://schemas.openxmlformats.org/officeDocument/2006/relationships" xmlns:p="http://schemas.openxmlformats.org/presentationml/2006/main">
+  <p:cSld name="Slide 15">
     <p:bg>
       <p:bgPr>
         <a:solidFill>
